--- a/output_pptx/Mighty_To_Save.pptx
+++ b/output_pptx/Mighty_To_Save.pptx
@@ -22,6 +22,9 @@
     <p:sldId id="270" r:id="rId21"/>
     <p:sldId id="271" r:id="rId22"/>
     <p:sldId id="272" r:id="rId23"/>
+    <p:sldId id="273" r:id="rId24"/>
+    <p:sldId id="274" r:id="rId25"/>
+    <p:sldId id="275" r:id="rId26"/>
   </p:sldIdLst>
   <p:sldSz cx="12191695" cy="6858000" type="screen4x3"/>
   <p:notesSz cx="6858000" cy="9144000"/>
@@ -3120,8 +3123,8 @@
         </p:nvSpPr>
         <p:spPr>
           <a:xfrm>
-            <a:off x="594360" y="2258568"/>
-            <a:ext cx="11002975" cy="685800"/>
+            <a:off x="640080" y="2052828"/>
+            <a:ext cx="10911535" cy="731520"/>
           </a:xfrm>
           <a:prstGeom prst="rect">
             <a:avLst/>
@@ -3136,7 +3139,7 @@
           <a:p>
             <a:pPr algn="ctr"/>
             <a:r>
-              <a:rPr sz="3805" b="1" i="0">
+              <a:rPr sz="4100" b="1" i="0">
                 <a:solidFill>
                   <a:srgbClr val="FFFFFF"/>
                 </a:solidFill>
@@ -3155,8 +3158,8 @@
         </p:nvSpPr>
         <p:spPr>
           <a:xfrm>
-            <a:off x="594360" y="2980944"/>
-            <a:ext cx="11002975" cy="347472"/>
+            <a:off x="640080" y="2985516"/>
+            <a:ext cx="10911535" cy="731520"/>
           </a:xfrm>
           <a:prstGeom prst="rect">
             <a:avLst/>
@@ -3171,83 +3174,13 @@
           <a:p>
             <a:pPr algn="ctr"/>
             <a:r>
-              <a:rPr sz="2200" b="0" i="1">
-                <a:solidFill>
-                  <a:srgbClr val="8C8C8C"/>
-                </a:solidFill>
-                <a:latin typeface="Arial"/>
-              </a:rPr>
-              <a:t/>
-            </a:r>
-          </a:p>
-        </p:txBody>
-      </p:sp>
-      <p:sp>
-        <p:nvSpPr>
-          <p:cNvPr id="4" name="TextBox 3"/>
-          <p:cNvSpPr txBox="1"/>
-          <p:nvPr/>
-        </p:nvSpPr>
-        <p:spPr>
-          <a:xfrm>
-            <a:off x="594360" y="3529584"/>
-            <a:ext cx="11002975" cy="685800"/>
-          </a:xfrm>
-          <a:prstGeom prst="rect">
-            <a:avLst/>
-          </a:prstGeom>
-          <a:noFill/>
-        </p:spPr>
-        <p:txBody>
-          <a:bodyPr wrap="square">
-            <a:spAutoFit/>
-          </a:bodyPr>
-          <a:lstStyle/>
-          <a:p>
-            <a:pPr algn="ctr"/>
-            <a:r>
-              <a:rPr sz="4400" b="1" i="0">
+              <a:rPr sz="4800" b="1" i="0">
                 <a:solidFill>
                   <a:srgbClr val="FFFFFF"/>
                 </a:solidFill>
                 <a:latin typeface="Arial"/>
               </a:rPr>
               <a:t>Perdão e compaixão</a:t>
-            </a:r>
-          </a:p>
-        </p:txBody>
-      </p:sp>
-      <p:sp>
-        <p:nvSpPr>
-          <p:cNvPr id="5" name="TextBox 4"/>
-          <p:cNvSpPr txBox="1"/>
-          <p:nvPr/>
-        </p:nvSpPr>
-        <p:spPr>
-          <a:xfrm>
-            <a:off x="594360" y="4251960"/>
-            <a:ext cx="11002975" cy="347472"/>
-          </a:xfrm>
-          <a:prstGeom prst="rect">
-            <a:avLst/>
-          </a:prstGeom>
-          <a:noFill/>
-        </p:spPr>
-        <p:txBody>
-          <a:bodyPr wrap="square">
-            <a:spAutoFit/>
-          </a:bodyPr>
-          <a:lstStyle/>
-          <a:p>
-            <a:pPr algn="ctr"/>
-            <a:r>
-              <a:rPr sz="2200" b="0" i="1">
-                <a:solidFill>
-                  <a:srgbClr val="8C8C8C"/>
-                </a:solidFill>
-                <a:latin typeface="Arial"/>
-              </a:rPr>
-              <a:t/>
             </a:r>
           </a:p>
         </p:txBody>
@@ -3286,8 +3219,8 @@
         </p:nvSpPr>
         <p:spPr>
           <a:xfrm>
-            <a:off x="594360" y="1837944"/>
-            <a:ext cx="11002975" cy="685800"/>
+            <a:off x="640080" y="1650492"/>
+            <a:ext cx="10911535" cy="731520"/>
           </a:xfrm>
           <a:prstGeom prst="rect">
             <a:avLst/>
@@ -3302,13 +3235,13 @@
           <a:p>
             <a:pPr algn="ctr"/>
             <a:r>
-              <a:rPr sz="4400" b="1" i="0">
+              <a:rPr sz="4800" b="1" i="0">
                 <a:solidFill>
                   <a:srgbClr val="FFFFFF"/>
                 </a:solidFill>
                 <a:latin typeface="Arial"/>
               </a:rPr>
-              <a:t>救い生み出す主よ</a:t>
+              <a:t>私のすべてを受け入れ再び みたされる</a:t>
             </a:r>
           </a:p>
         </p:txBody>
@@ -3321,8 +3254,8 @@
         </p:nvSpPr>
         <p:spPr>
           <a:xfrm>
-            <a:off x="594360" y="2560320"/>
-            <a:ext cx="11002975" cy="384048"/>
+            <a:off x="640080" y="2418588"/>
+            <a:ext cx="10911535" cy="365760"/>
           </a:xfrm>
           <a:prstGeom prst="rect">
             <a:avLst/>
@@ -3339,11 +3272,11 @@
             <a:r>
               <a:rPr sz="2400" b="0" i="1">
                 <a:solidFill>
-                  <a:srgbClr val="B4B4B4"/>
+                  <a:srgbClr val="AAAAAA"/>
                 </a:solidFill>
                 <a:latin typeface="Arial"/>
               </a:rPr>
-              <a:t>sukui umidasu shuyo</a:t>
+              <a:t>watashi no subete wo ukeirefutatabi mitasareru</a:t>
             </a:r>
           </a:p>
         </p:txBody>
@@ -3356,8 +3289,8 @@
         </p:nvSpPr>
         <p:spPr>
           <a:xfrm>
-            <a:off x="594360" y="2980944"/>
-            <a:ext cx="11002975" cy="347472"/>
+            <a:off x="640080" y="2985516"/>
+            <a:ext cx="10911535" cy="731520"/>
           </a:xfrm>
           <a:prstGeom prst="rect">
             <a:avLst/>
@@ -3372,13 +3305,13 @@
           <a:p>
             <a:pPr algn="ctr"/>
             <a:r>
-              <a:rPr sz="2000" b="0" i="1">
-                <a:solidFill>
-                  <a:srgbClr val="8C8C8C"/>
+              <a:rPr sz="4800" b="1" i="0">
+                <a:solidFill>
+                  <a:srgbClr val="FFFFFF"/>
                 </a:solidFill>
                 <a:latin typeface="Arial"/>
               </a:rPr>
-              <a:t/>
+              <a:t>命をささげてついてゆきたい</a:t>
             </a:r>
           </a:p>
         </p:txBody>
@@ -3391,8 +3324,8 @@
         </p:nvSpPr>
         <p:spPr>
           <a:xfrm>
-            <a:off x="594360" y="3529584"/>
-            <a:ext cx="11002975" cy="685800"/>
+            <a:off x="640080" y="3753612"/>
+            <a:ext cx="10911535" cy="365760"/>
           </a:xfrm>
           <a:prstGeom prst="rect">
             <a:avLst/>
@@ -3407,13 +3340,13 @@
           <a:p>
             <a:pPr algn="ctr"/>
             <a:r>
-              <a:rPr sz="4400" b="1" i="0">
-                <a:solidFill>
-                  <a:srgbClr val="FFFFFF"/>
+              <a:rPr sz="2400" b="0" i="1">
+                <a:solidFill>
+                  <a:srgbClr val="AAAAAA"/>
                 </a:solidFill>
                 <a:latin typeface="Arial"/>
               </a:rPr>
-              <a:t>イエスは死にも打ち勝つ神</a:t>
+              <a:t>inochi wo sasagete tsuite yukitai</a:t>
             </a:r>
           </a:p>
         </p:txBody>
@@ -3426,8 +3359,8 @@
         </p:nvSpPr>
         <p:spPr>
           <a:xfrm>
-            <a:off x="594360" y="4251960"/>
-            <a:ext cx="11002975" cy="384048"/>
+            <a:off x="640080" y="4530852"/>
+            <a:ext cx="10911535" cy="310896"/>
           </a:xfrm>
           <a:prstGeom prst="rect">
             <a:avLst/>
@@ -3442,13 +3375,13 @@
           <a:p>
             <a:pPr algn="ctr"/>
             <a:r>
-              <a:rPr sz="2400" b="0" i="1">
-                <a:solidFill>
-                  <a:srgbClr val="B4B4B4"/>
+              <a:rPr sz="2000" b="0" i="1">
+                <a:solidFill>
+                  <a:srgbClr val="828282"/>
                 </a:solidFill>
                 <a:latin typeface="Arial"/>
               </a:rPr>
-              <a:t>iesu wa shi ni mo uchikatsu kami</a:t>
+              <a:t>Todos necessitam de um amor perfeito,</a:t>
             </a:r>
           </a:p>
         </p:txBody>
@@ -3461,8 +3394,8 @@
         </p:nvSpPr>
         <p:spPr>
           <a:xfrm>
-            <a:off x="594360" y="4672584"/>
-            <a:ext cx="11002975" cy="347472"/>
+            <a:off x="640080" y="4896612"/>
+            <a:ext cx="10911535" cy="310896"/>
           </a:xfrm>
           <a:prstGeom prst="rect">
             <a:avLst/>
@@ -3479,11 +3412,11 @@
             <a:r>
               <a:rPr sz="2000" b="0" i="1">
                 <a:solidFill>
-                  <a:srgbClr val="8C8C8C"/>
+                  <a:srgbClr val="828282"/>
                 </a:solidFill>
                 <a:latin typeface="Arial"/>
               </a:rPr>
-              <a:t/>
+              <a:t>Perdão e compaixão</a:t>
             </a:r>
           </a:p>
         </p:txBody>
@@ -3522,8 +3455,8 @@
         </p:nvSpPr>
         <p:spPr>
           <a:xfrm>
-            <a:off x="594360" y="2258568"/>
-            <a:ext cx="11002975" cy="685800"/>
+            <a:off x="640080" y="2500884"/>
+            <a:ext cx="10911535" cy="731520"/>
           </a:xfrm>
           <a:prstGeom prst="rect">
             <a:avLst/>
@@ -3538,13 +3471,13 @@
           <a:p>
             <a:pPr algn="ctr"/>
             <a:r>
-              <a:rPr sz="4400" b="1" i="0">
+              <a:rPr sz="4800" b="1" i="0">
                 <a:solidFill>
                   <a:srgbClr val="FFFFFF"/>
                 </a:solidFill>
                 <a:latin typeface="Arial"/>
               </a:rPr>
-              <a:t>Possa o mundo ver brilhar a luz</a:t>
+              <a:t>すべて委ね</a:t>
             </a:r>
           </a:p>
         </p:txBody>
@@ -3557,8 +3490,8 @@
         </p:nvSpPr>
         <p:spPr>
           <a:xfrm>
-            <a:off x="594360" y="2980944"/>
-            <a:ext cx="11002975" cy="347472"/>
+            <a:off x="640080" y="3268980"/>
+            <a:ext cx="10911535" cy="365760"/>
           </a:xfrm>
           <a:prstGeom prst="rect">
             <a:avLst/>
@@ -3573,13 +3506,13 @@
           <a:p>
             <a:pPr algn="ctr"/>
             <a:r>
-              <a:rPr sz="2200" b="0" i="1">
-                <a:solidFill>
-                  <a:srgbClr val="8C8C8C"/>
+              <a:rPr sz="2400" b="0" i="1">
+                <a:solidFill>
+                  <a:srgbClr val="AAAAAA"/>
                 </a:solidFill>
                 <a:latin typeface="Arial"/>
               </a:rPr>
-              <a:t/>
+              <a:t>subete yudane</a:t>
             </a:r>
           </a:p>
         </p:txBody>
@@ -3592,8 +3525,8 @@
         </p:nvSpPr>
         <p:spPr>
           <a:xfrm>
-            <a:off x="594360" y="3529584"/>
-            <a:ext cx="11002975" cy="685800"/>
+            <a:off x="640080" y="4046220"/>
+            <a:ext cx="10911535" cy="310896"/>
           </a:xfrm>
           <a:prstGeom prst="rect">
             <a:avLst/>
@@ -3608,48 +3541,13 @@
           <a:p>
             <a:pPr algn="ctr"/>
             <a:r>
-              <a:rPr sz="3705" b="1" i="0">
-                <a:solidFill>
-                  <a:srgbClr val="FFFFFF"/>
+              <a:rPr sz="2000" b="0" i="1">
+                <a:solidFill>
+                  <a:srgbClr val="828282"/>
                 </a:solidFill>
                 <a:latin typeface="Arial"/>
               </a:rPr>
-              <a:t>Cantamos para a glória do Senhor Jesus</a:t>
-            </a:r>
-          </a:p>
-        </p:txBody>
-      </p:sp>
-      <p:sp>
-        <p:nvSpPr>
-          <p:cNvPr id="5" name="TextBox 4"/>
-          <p:cNvSpPr txBox="1"/>
-          <p:nvPr/>
-        </p:nvSpPr>
-        <p:spPr>
-          <a:xfrm>
-            <a:off x="594360" y="4251960"/>
-            <a:ext cx="11002975" cy="347472"/>
-          </a:xfrm>
-          <a:prstGeom prst="rect">
-            <a:avLst/>
-          </a:prstGeom>
-          <a:noFill/>
-        </p:spPr>
-        <p:txBody>
-          <a:bodyPr wrap="square">
-            <a:spAutoFit/>
-          </a:bodyPr>
-          <a:lstStyle/>
-          <a:p>
-            <a:pPr algn="ctr"/>
-            <a:r>
-              <a:rPr sz="2200" b="0" i="1">
-                <a:solidFill>
-                  <a:srgbClr val="8C8C8C"/>
-                </a:solidFill>
-                <a:latin typeface="Arial"/>
-              </a:rPr>
-              <a:t/>
+              <a:t>Todos necessitam de graça e esperança</a:t>
             </a:r>
           </a:p>
         </p:txBody>
@@ -3688,8 +3586,8 @@
         </p:nvSpPr>
         <p:spPr>
           <a:xfrm>
-            <a:off x="594360" y="2258568"/>
-            <a:ext cx="11002975" cy="685800"/>
+            <a:off x="640080" y="1650492"/>
+            <a:ext cx="10911535" cy="731520"/>
           </a:xfrm>
           <a:prstGeom prst="rect">
             <a:avLst/>
@@ -3704,13 +3602,13 @@
           <a:p>
             <a:pPr algn="ctr"/>
             <a:r>
-              <a:rPr sz="4400" b="1" i="0">
+              <a:rPr sz="4800" b="1" i="0">
                 <a:solidFill>
                   <a:srgbClr val="FFFFFF"/>
                 </a:solidFill>
                 <a:latin typeface="Arial"/>
               </a:rPr>
-              <a:t>Possa o mundo ver brilhar a luz</a:t>
+              <a:t>主よ救いの神</a:t>
             </a:r>
           </a:p>
         </p:txBody>
@@ -3723,8 +3621,8 @@
         </p:nvSpPr>
         <p:spPr>
           <a:xfrm>
-            <a:off x="594360" y="2980944"/>
-            <a:ext cx="11002975" cy="347472"/>
+            <a:off x="640080" y="2418588"/>
+            <a:ext cx="10911535" cy="365760"/>
           </a:xfrm>
           <a:prstGeom prst="rect">
             <a:avLst/>
@@ -3739,13 +3637,13 @@
           <a:p>
             <a:pPr algn="ctr"/>
             <a:r>
-              <a:rPr sz="2200" b="0" i="1">
-                <a:solidFill>
-                  <a:srgbClr val="8C8C8C"/>
+              <a:rPr sz="2400" b="0" i="1">
+                <a:solidFill>
+                  <a:srgbClr val="AAAAAA"/>
                 </a:solidFill>
                 <a:latin typeface="Arial"/>
               </a:rPr>
-              <a:t/>
+              <a:t>shuyo sukui no kami</a:t>
             </a:r>
           </a:p>
         </p:txBody>
@@ -3758,8 +3656,8 @@
         </p:nvSpPr>
         <p:spPr>
           <a:xfrm>
-            <a:off x="594360" y="3529584"/>
-            <a:ext cx="11002975" cy="685800"/>
+            <a:off x="640080" y="2985516"/>
+            <a:ext cx="10911535" cy="731520"/>
           </a:xfrm>
           <a:prstGeom prst="rect">
             <a:avLst/>
@@ -3774,13 +3672,13 @@
           <a:p>
             <a:pPr algn="ctr"/>
             <a:r>
-              <a:rPr sz="3705" b="1" i="0">
+              <a:rPr sz="4800" b="1" i="0">
                 <a:solidFill>
                   <a:srgbClr val="FFFFFF"/>
                 </a:solidFill>
                 <a:latin typeface="Arial"/>
               </a:rPr>
-              <a:t>Cantamos para a glória do Senhor Jesus</a:t>
+              <a:t>山も動かす力強さ</a:t>
             </a:r>
           </a:p>
         </p:txBody>
@@ -3793,8 +3691,8 @@
         </p:nvSpPr>
         <p:spPr>
           <a:xfrm>
-            <a:off x="594360" y="4251960"/>
-            <a:ext cx="11002975" cy="347472"/>
+            <a:off x="640080" y="3753612"/>
+            <a:ext cx="10911535" cy="365760"/>
           </a:xfrm>
           <a:prstGeom prst="rect">
             <a:avLst/>
@@ -3809,13 +3707,83 @@
           <a:p>
             <a:pPr algn="ctr"/>
             <a:r>
-              <a:rPr sz="2200" b="0" i="1">
-                <a:solidFill>
-                  <a:srgbClr val="8C8C8C"/>
+              <a:rPr sz="2400" b="0" i="1">
+                <a:solidFill>
+                  <a:srgbClr val="AAAAAA"/>
                 </a:solidFill>
                 <a:latin typeface="Arial"/>
               </a:rPr>
-              <a:t/>
+              <a:t>yama mo ugokasu chikarazuyosa</a:t>
+            </a:r>
+          </a:p>
+        </p:txBody>
+      </p:sp>
+      <p:sp>
+        <p:nvSpPr>
+          <p:cNvPr id="6" name="TextBox 5"/>
+          <p:cNvSpPr txBox="1"/>
+          <p:nvPr/>
+        </p:nvSpPr>
+        <p:spPr>
+          <a:xfrm>
+            <a:off x="640080" y="4530852"/>
+            <a:ext cx="10911535" cy="310896"/>
+          </a:xfrm>
+          <a:prstGeom prst="rect">
+            <a:avLst/>
+          </a:prstGeom>
+          <a:noFill/>
+        </p:spPr>
+        <p:txBody>
+          <a:bodyPr wrap="square">
+            <a:spAutoFit/>
+          </a:bodyPr>
+          <a:lstStyle/>
+          <a:p>
+            <a:pPr algn="ctr"/>
+            <a:r>
+              <a:rPr sz="2000" b="0" i="1">
+                <a:solidFill>
+                  <a:srgbClr val="828282"/>
+                </a:solidFill>
+                <a:latin typeface="Arial"/>
+              </a:rPr>
+              <a:t>Tem poder pra salvar.</a:t>
+            </a:r>
+          </a:p>
+        </p:txBody>
+      </p:sp>
+      <p:sp>
+        <p:nvSpPr>
+          <p:cNvPr id="7" name="TextBox 6"/>
+          <p:cNvSpPr txBox="1"/>
+          <p:nvPr/>
+        </p:nvSpPr>
+        <p:spPr>
+          <a:xfrm>
+            <a:off x="640080" y="4896612"/>
+            <a:ext cx="10911535" cy="310896"/>
+          </a:xfrm>
+          <a:prstGeom prst="rect">
+            <a:avLst/>
+          </a:prstGeom>
+          <a:noFill/>
+        </p:spPr>
+        <p:txBody>
+          <a:bodyPr wrap="square">
+            <a:spAutoFit/>
+          </a:bodyPr>
+          <a:lstStyle/>
+          <a:p>
+            <a:pPr algn="ctr"/>
+            <a:r>
+              <a:rPr sz="2000" b="0" i="1">
+                <a:solidFill>
+                  <a:srgbClr val="828282"/>
+                </a:solidFill>
+                <a:latin typeface="Arial"/>
+              </a:rPr>
+              <a:t>Pra sempre autor da salvação</a:t>
             </a:r>
           </a:p>
         </p:txBody>
@@ -3854,8 +3822,8 @@
         </p:nvSpPr>
         <p:spPr>
           <a:xfrm>
-            <a:off x="594360" y="2258568"/>
-            <a:ext cx="11002975" cy="685800"/>
+            <a:off x="640080" y="1650492"/>
+            <a:ext cx="10911535" cy="731520"/>
           </a:xfrm>
           <a:prstGeom prst="rect">
             <a:avLst/>
@@ -3870,13 +3838,13 @@
           <a:p>
             <a:pPr algn="ctr"/>
             <a:r>
-              <a:rPr sz="4400" b="1" i="0">
+              <a:rPr sz="4800" b="1" i="0">
                 <a:solidFill>
                   <a:srgbClr val="FFFFFF"/>
                 </a:solidFill>
                 <a:latin typeface="Arial"/>
               </a:rPr>
-              <a:t>Possa o mundo ver brilhar a luz</a:t>
+              <a:t>救い生み出す主よ</a:t>
             </a:r>
           </a:p>
         </p:txBody>
@@ -3889,8 +3857,8 @@
         </p:nvSpPr>
         <p:spPr>
           <a:xfrm>
-            <a:off x="594360" y="2980944"/>
-            <a:ext cx="11002975" cy="347472"/>
+            <a:off x="640080" y="2418588"/>
+            <a:ext cx="10911535" cy="365760"/>
           </a:xfrm>
           <a:prstGeom prst="rect">
             <a:avLst/>
@@ -3905,13 +3873,13 @@
           <a:p>
             <a:pPr algn="ctr"/>
             <a:r>
-              <a:rPr sz="2200" b="0" i="1">
-                <a:solidFill>
-                  <a:srgbClr val="8C8C8C"/>
+              <a:rPr sz="2400" b="0" i="1">
+                <a:solidFill>
+                  <a:srgbClr val="AAAAAA"/>
                 </a:solidFill>
                 <a:latin typeface="Arial"/>
               </a:rPr>
-              <a:t/>
+              <a:t>sukui umidasu shuyo</a:t>
             </a:r>
           </a:p>
         </p:txBody>
@@ -3924,8 +3892,8 @@
         </p:nvSpPr>
         <p:spPr>
           <a:xfrm>
-            <a:off x="594360" y="3529584"/>
-            <a:ext cx="11002975" cy="685800"/>
+            <a:off x="640080" y="2985516"/>
+            <a:ext cx="10911535" cy="731520"/>
           </a:xfrm>
           <a:prstGeom prst="rect">
             <a:avLst/>
@@ -3940,13 +3908,13 @@
           <a:p>
             <a:pPr algn="ctr"/>
             <a:r>
-              <a:rPr sz="3705" b="1" i="0">
+              <a:rPr sz="4800" b="1" i="0">
                 <a:solidFill>
                   <a:srgbClr val="FFFFFF"/>
                 </a:solidFill>
                 <a:latin typeface="Arial"/>
               </a:rPr>
-              <a:t>Cantamos para a glória do Senhor Jesus</a:t>
+              <a:t>イエスは死にも打ち勝つ神</a:t>
             </a:r>
           </a:p>
         </p:txBody>
@@ -3959,8 +3927,8 @@
         </p:nvSpPr>
         <p:spPr>
           <a:xfrm>
-            <a:off x="594360" y="4251960"/>
-            <a:ext cx="11002975" cy="347472"/>
+            <a:off x="640080" y="3753612"/>
+            <a:ext cx="10911535" cy="365760"/>
           </a:xfrm>
           <a:prstGeom prst="rect">
             <a:avLst/>
@@ -3975,13 +3943,83 @@
           <a:p>
             <a:pPr algn="ctr"/>
             <a:r>
-              <a:rPr sz="2200" b="0" i="1">
-                <a:solidFill>
-                  <a:srgbClr val="8C8C8C"/>
+              <a:rPr sz="2400" b="0" i="1">
+                <a:solidFill>
+                  <a:srgbClr val="AAAAAA"/>
                 </a:solidFill>
                 <a:latin typeface="Arial"/>
               </a:rPr>
-              <a:t/>
+              <a:t>iesu wa shi ni mo uchikatsu kami</a:t>
+            </a:r>
+          </a:p>
+        </p:txBody>
+      </p:sp>
+      <p:sp>
+        <p:nvSpPr>
+          <p:cNvPr id="6" name="TextBox 5"/>
+          <p:cNvSpPr txBox="1"/>
+          <p:nvPr/>
+        </p:nvSpPr>
+        <p:spPr>
+          <a:xfrm>
+            <a:off x="640080" y="4530852"/>
+            <a:ext cx="10911535" cy="310896"/>
+          </a:xfrm>
+          <a:prstGeom prst="rect">
+            <a:avLst/>
+          </a:prstGeom>
+          <a:noFill/>
+        </p:spPr>
+        <p:txBody>
+          <a:bodyPr wrap="square">
+            <a:spAutoFit/>
+          </a:bodyPr>
+          <a:lstStyle/>
+          <a:p>
+            <a:pPr algn="ctr"/>
+            <a:r>
+              <a:rPr sz="2000" b="0" i="1">
+                <a:solidFill>
+                  <a:srgbClr val="828282"/>
+                </a:solidFill>
+                <a:latin typeface="Arial"/>
+              </a:rPr>
+              <a:t>Jesus a morte venceu, sobre a morte venceu.</a:t>
+            </a:r>
+          </a:p>
+        </p:txBody>
+      </p:sp>
+      <p:sp>
+        <p:nvSpPr>
+          <p:cNvPr id="7" name="TextBox 6"/>
+          <p:cNvSpPr txBox="1"/>
+          <p:nvPr/>
+        </p:nvSpPr>
+        <p:spPr>
+          <a:xfrm>
+            <a:off x="640080" y="4896612"/>
+            <a:ext cx="10911535" cy="310896"/>
+          </a:xfrm>
+          <a:prstGeom prst="rect">
+            <a:avLst/>
+          </a:prstGeom>
+          <a:noFill/>
+        </p:spPr>
+        <p:txBody>
+          <a:bodyPr wrap="square">
+            <a:spAutoFit/>
+          </a:bodyPr>
+          <a:lstStyle/>
+          <a:p>
+            <a:pPr algn="ctr"/>
+            <a:r>
+              <a:rPr sz="2000" b="0" i="1">
+                <a:solidFill>
+                  <a:srgbClr val="828282"/>
+                </a:solidFill>
+                <a:latin typeface="Arial"/>
+              </a:rPr>
+              <a:t>Me aceitas com meus medos, falhas e temores</a:t>
             </a:r>
           </a:p>
         </p:txBody>
@@ -4020,8 +4058,8 @@
         </p:nvSpPr>
         <p:spPr>
           <a:xfrm>
-            <a:off x="594360" y="2258568"/>
-            <a:ext cx="11002975" cy="685800"/>
+            <a:off x="640080" y="2052828"/>
+            <a:ext cx="10911535" cy="731520"/>
           </a:xfrm>
           <a:prstGeom prst="rect">
             <a:avLst/>
@@ -4036,7 +4074,7 @@
           <a:p>
             <a:pPr algn="ctr"/>
             <a:r>
-              <a:rPr sz="4400" b="1" i="0">
+              <a:rPr sz="4800" b="1" i="0">
                 <a:solidFill>
                   <a:srgbClr val="FFFFFF"/>
                 </a:solidFill>
@@ -4055,8 +4093,8 @@
         </p:nvSpPr>
         <p:spPr>
           <a:xfrm>
-            <a:off x="594360" y="2980944"/>
-            <a:ext cx="11002975" cy="347472"/>
+            <a:off x="640080" y="2985516"/>
+            <a:ext cx="10911535" cy="731520"/>
           </a:xfrm>
           <a:prstGeom prst="rect">
             <a:avLst/>
@@ -4071,83 +4109,13 @@
           <a:p>
             <a:pPr algn="ctr"/>
             <a:r>
-              <a:rPr sz="2200" b="0" i="1">
-                <a:solidFill>
-                  <a:srgbClr val="8C8C8C"/>
-                </a:solidFill>
-                <a:latin typeface="Arial"/>
-              </a:rPr>
-              <a:t/>
-            </a:r>
-          </a:p>
-        </p:txBody>
-      </p:sp>
-      <p:sp>
-        <p:nvSpPr>
-          <p:cNvPr id="4" name="TextBox 3"/>
-          <p:cNvSpPr txBox="1"/>
-          <p:nvPr/>
-        </p:nvSpPr>
-        <p:spPr>
-          <a:xfrm>
-            <a:off x="594360" y="3529584"/>
-            <a:ext cx="11002975" cy="685800"/>
-          </a:xfrm>
-          <a:prstGeom prst="rect">
-            <a:avLst/>
-          </a:prstGeom>
-          <a:noFill/>
-        </p:spPr>
-        <p:txBody>
-          <a:bodyPr wrap="square">
-            <a:spAutoFit/>
-          </a:bodyPr>
-          <a:lstStyle/>
-          <a:p>
-            <a:pPr algn="ctr"/>
-            <a:r>
-              <a:rPr sz="3705" b="1" i="0">
+              <a:rPr sz="4000" b="1" i="0">
                 <a:solidFill>
                   <a:srgbClr val="FFFFFF"/>
                 </a:solidFill>
                 <a:latin typeface="Arial"/>
               </a:rPr>
               <a:t>Cantamos para a glória do Senhor Jesus</a:t>
-            </a:r>
-          </a:p>
-        </p:txBody>
-      </p:sp>
-      <p:sp>
-        <p:nvSpPr>
-          <p:cNvPr id="5" name="TextBox 4"/>
-          <p:cNvSpPr txBox="1"/>
-          <p:nvPr/>
-        </p:nvSpPr>
-        <p:spPr>
-          <a:xfrm>
-            <a:off x="594360" y="4251960"/>
-            <a:ext cx="11002975" cy="347472"/>
-          </a:xfrm>
-          <a:prstGeom prst="rect">
-            <a:avLst/>
-          </a:prstGeom>
-          <a:noFill/>
-        </p:spPr>
-        <p:txBody>
-          <a:bodyPr wrap="square">
-            <a:spAutoFit/>
-          </a:bodyPr>
-          <a:lstStyle/>
-          <a:p>
-            <a:pPr algn="ctr"/>
-            <a:r>
-              <a:rPr sz="2200" b="0" i="1">
-                <a:solidFill>
-                  <a:srgbClr val="8C8C8C"/>
-                </a:solidFill>
-                <a:latin typeface="Arial"/>
-              </a:rPr>
-              <a:t/>
             </a:r>
           </a:p>
         </p:txBody>
@@ -4186,8 +4154,8 @@
         </p:nvSpPr>
         <p:spPr>
           <a:xfrm>
-            <a:off x="594360" y="2258568"/>
-            <a:ext cx="11002975" cy="685800"/>
+            <a:off x="640080" y="2052828"/>
+            <a:ext cx="10911535" cy="731520"/>
           </a:xfrm>
           <a:prstGeom prst="rect">
             <a:avLst/>
@@ -4202,7 +4170,7 @@
           <a:p>
             <a:pPr algn="ctr"/>
             <a:r>
-              <a:rPr sz="4400" b="1" i="0">
+              <a:rPr sz="4800" b="1" i="0">
                 <a:solidFill>
                   <a:srgbClr val="FFFFFF"/>
                 </a:solidFill>
@@ -4221,8 +4189,8 @@
         </p:nvSpPr>
         <p:spPr>
           <a:xfrm>
-            <a:off x="594360" y="2980944"/>
-            <a:ext cx="11002975" cy="347472"/>
+            <a:off x="640080" y="2985516"/>
+            <a:ext cx="10911535" cy="731520"/>
           </a:xfrm>
           <a:prstGeom prst="rect">
             <a:avLst/>
@@ -4237,83 +4205,13 @@
           <a:p>
             <a:pPr algn="ctr"/>
             <a:r>
-              <a:rPr sz="2200" b="0" i="1">
-                <a:solidFill>
-                  <a:srgbClr val="8C8C8C"/>
-                </a:solidFill>
-                <a:latin typeface="Arial"/>
-              </a:rPr>
-              <a:t/>
-            </a:r>
-          </a:p>
-        </p:txBody>
-      </p:sp>
-      <p:sp>
-        <p:nvSpPr>
-          <p:cNvPr id="4" name="TextBox 3"/>
-          <p:cNvSpPr txBox="1"/>
-          <p:nvPr/>
-        </p:nvSpPr>
-        <p:spPr>
-          <a:xfrm>
-            <a:off x="594360" y="3529584"/>
-            <a:ext cx="11002975" cy="685800"/>
-          </a:xfrm>
-          <a:prstGeom prst="rect">
-            <a:avLst/>
-          </a:prstGeom>
-          <a:noFill/>
-        </p:spPr>
-        <p:txBody>
-          <a:bodyPr wrap="square">
-            <a:spAutoFit/>
-          </a:bodyPr>
-          <a:lstStyle/>
-          <a:p>
-            <a:pPr algn="ctr"/>
-            <a:r>
-              <a:rPr sz="3705" b="1" i="0">
+              <a:rPr sz="4000" b="1" i="0">
                 <a:solidFill>
                   <a:srgbClr val="FFFFFF"/>
                 </a:solidFill>
                 <a:latin typeface="Arial"/>
               </a:rPr>
               <a:t>Cantamos para a glória do Senhor Jesus</a:t>
-            </a:r>
-          </a:p>
-        </p:txBody>
-      </p:sp>
-      <p:sp>
-        <p:nvSpPr>
-          <p:cNvPr id="5" name="TextBox 4"/>
-          <p:cNvSpPr txBox="1"/>
-          <p:nvPr/>
-        </p:nvSpPr>
-        <p:spPr>
-          <a:xfrm>
-            <a:off x="594360" y="4251960"/>
-            <a:ext cx="11002975" cy="347472"/>
-          </a:xfrm>
-          <a:prstGeom prst="rect">
-            <a:avLst/>
-          </a:prstGeom>
-          <a:noFill/>
-        </p:spPr>
-        <p:txBody>
-          <a:bodyPr wrap="square">
-            <a:spAutoFit/>
-          </a:bodyPr>
-          <a:lstStyle/>
-          <a:p>
-            <a:pPr algn="ctr"/>
-            <a:r>
-              <a:rPr sz="2200" b="0" i="1">
-                <a:solidFill>
-                  <a:srgbClr val="8C8C8C"/>
-                </a:solidFill>
-                <a:latin typeface="Arial"/>
-              </a:rPr>
-              <a:t/>
             </a:r>
           </a:p>
         </p:txBody>
@@ -4352,8 +4250,8 @@
         </p:nvSpPr>
         <p:spPr>
           <a:xfrm>
-            <a:off x="594360" y="1837944"/>
-            <a:ext cx="11002975" cy="685800"/>
+            <a:off x="640080" y="2052828"/>
+            <a:ext cx="10911535" cy="731520"/>
           </a:xfrm>
           <a:prstGeom prst="rect">
             <a:avLst/>
@@ -4368,13 +4266,13 @@
           <a:p>
             <a:pPr algn="ctr"/>
             <a:r>
-              <a:rPr sz="4400" b="1" i="0">
+              <a:rPr sz="4800" b="1" i="0">
                 <a:solidFill>
                   <a:srgbClr val="FFFFFF"/>
                 </a:solidFill>
                 <a:latin typeface="Arial"/>
               </a:rPr>
-              <a:t>主よ救いの神 山も動かす力強さ</a:t>
+              <a:t>Possa o mundo ver brilhar a luz</a:t>
             </a:r>
           </a:p>
         </p:txBody>
@@ -4387,8 +4285,8 @@
         </p:nvSpPr>
         <p:spPr>
           <a:xfrm>
-            <a:off x="594360" y="2560320"/>
-            <a:ext cx="11002975" cy="384048"/>
+            <a:off x="640080" y="2985516"/>
+            <a:ext cx="10911535" cy="731520"/>
           </a:xfrm>
           <a:prstGeom prst="rect">
             <a:avLst/>
@@ -4403,153 +4301,13 @@
           <a:p>
             <a:pPr algn="ctr"/>
             <a:r>
-              <a:rPr sz="1976" b="0" i="1">
-                <a:solidFill>
-                  <a:srgbClr val="B4B4B4"/>
+              <a:rPr sz="4000" b="1" i="0">
+                <a:solidFill>
+                  <a:srgbClr val="FFFFFF"/>
                 </a:solidFill>
                 <a:latin typeface="Arial"/>
               </a:rPr>
-              <a:t>shu yo sukui no kami yama mo ugoka su chikarazuyosa</a:t>
-            </a:r>
-          </a:p>
-        </p:txBody>
-      </p:sp>
-      <p:sp>
-        <p:nvSpPr>
-          <p:cNvPr id="4" name="TextBox 3"/>
-          <p:cNvSpPr txBox="1"/>
-          <p:nvPr/>
-        </p:nvSpPr>
-        <p:spPr>
-          <a:xfrm>
-            <a:off x="594360" y="2980944"/>
-            <a:ext cx="11002975" cy="347472"/>
-          </a:xfrm>
-          <a:prstGeom prst="rect">
-            <a:avLst/>
-          </a:prstGeom>
-          <a:noFill/>
-        </p:spPr>
-        <p:txBody>
-          <a:bodyPr wrap="square">
-            <a:spAutoFit/>
-          </a:bodyPr>
-          <a:lstStyle/>
-          <a:p>
-            <a:pPr algn="ctr"/>
-            <a:r>
-              <a:rPr sz="2000" b="0" i="1">
-                <a:solidFill>
-                  <a:srgbClr val="8C8C8C"/>
-                </a:solidFill>
-                <a:latin typeface="Arial"/>
-              </a:rPr>
-              <a:t/>
-            </a:r>
-          </a:p>
-        </p:txBody>
-      </p:sp>
-      <p:sp>
-        <p:nvSpPr>
-          <p:cNvPr id="5" name="TextBox 4"/>
-          <p:cNvSpPr txBox="1"/>
-          <p:nvPr/>
-        </p:nvSpPr>
-        <p:spPr>
-          <a:xfrm>
-            <a:off x="594360" y="3529584"/>
-            <a:ext cx="11002975" cy="685800"/>
-          </a:xfrm>
-          <a:prstGeom prst="rect">
-            <a:avLst/>
-          </a:prstGeom>
-          <a:noFill/>
-        </p:spPr>
-        <p:txBody>
-          <a:bodyPr wrap="square">
-            <a:spAutoFit/>
-          </a:bodyPr>
-          <a:lstStyle/>
-          <a:p>
-            <a:pPr algn="ctr"/>
-            <a:r>
-              <a:rPr sz="4400" b="1" i="0">
-                <a:solidFill>
-                  <a:srgbClr val="FFFFFF"/>
-                </a:solidFill>
-                <a:latin typeface="Arial"/>
-              </a:rPr>
-              <a:t>救い生み出す主よ</a:t>
-            </a:r>
-          </a:p>
-        </p:txBody>
-      </p:sp>
-      <p:sp>
-        <p:nvSpPr>
-          <p:cNvPr id="6" name="TextBox 5"/>
-          <p:cNvSpPr txBox="1"/>
-          <p:nvPr/>
-        </p:nvSpPr>
-        <p:spPr>
-          <a:xfrm>
-            <a:off x="594360" y="4251960"/>
-            <a:ext cx="11002975" cy="384048"/>
-          </a:xfrm>
-          <a:prstGeom prst="rect">
-            <a:avLst/>
-          </a:prstGeom>
-          <a:noFill/>
-        </p:spPr>
-        <p:txBody>
-          <a:bodyPr wrap="square">
-            <a:spAutoFit/>
-          </a:bodyPr>
-          <a:lstStyle/>
-          <a:p>
-            <a:pPr algn="ctr"/>
-            <a:r>
-              <a:rPr sz="2400" b="0" i="1">
-                <a:solidFill>
-                  <a:srgbClr val="B4B4B4"/>
-                </a:solidFill>
-                <a:latin typeface="Arial"/>
-              </a:rPr>
-              <a:t>sukui umidasu shu yo</a:t>
-            </a:r>
-          </a:p>
-        </p:txBody>
-      </p:sp>
-      <p:sp>
-        <p:nvSpPr>
-          <p:cNvPr id="7" name="TextBox 6"/>
-          <p:cNvSpPr txBox="1"/>
-          <p:nvPr/>
-        </p:nvSpPr>
-        <p:spPr>
-          <a:xfrm>
-            <a:off x="594360" y="4672584"/>
-            <a:ext cx="11002975" cy="347472"/>
-          </a:xfrm>
-          <a:prstGeom prst="rect">
-            <a:avLst/>
-          </a:prstGeom>
-          <a:noFill/>
-        </p:spPr>
-        <p:txBody>
-          <a:bodyPr wrap="square">
-            <a:spAutoFit/>
-          </a:bodyPr>
-          <a:lstStyle/>
-          <a:p>
-            <a:pPr algn="ctr"/>
-            <a:r>
-              <a:rPr sz="2000" b="0" i="1">
-                <a:solidFill>
-                  <a:srgbClr val="8C8C8C"/>
-                </a:solidFill>
-                <a:latin typeface="Arial"/>
-              </a:rPr>
-              <a:t/>
+              <a:t>Cantamos para a glória do Senhor Jesus</a:t>
             </a:r>
           </a:p>
         </p:txBody>
@@ -4588,8 +4346,8 @@
         </p:nvSpPr>
         <p:spPr>
           <a:xfrm>
-            <a:off x="594360" y="2683764"/>
-            <a:ext cx="11002975" cy="685800"/>
+            <a:off x="640080" y="2052828"/>
+            <a:ext cx="10911535" cy="731520"/>
           </a:xfrm>
           <a:prstGeom prst="rect">
             <a:avLst/>
@@ -4604,13 +4362,13 @@
           <a:p>
             <a:pPr algn="ctr"/>
             <a:r>
-              <a:rPr sz="4400" b="1" i="0">
+              <a:rPr sz="4800" b="1" i="0">
                 <a:solidFill>
                   <a:srgbClr val="FFFFFF"/>
                 </a:solidFill>
                 <a:latin typeface="Arial"/>
               </a:rPr>
-              <a:t>イエスは死にも打ち勝つ神</a:t>
+              <a:t>Possa o mundo ver brilhar a luz</a:t>
             </a:r>
           </a:p>
         </p:txBody>
@@ -4623,8 +4381,8 @@
         </p:nvSpPr>
         <p:spPr>
           <a:xfrm>
-            <a:off x="594360" y="3406140"/>
-            <a:ext cx="11002975" cy="384048"/>
+            <a:off x="640080" y="2985516"/>
+            <a:ext cx="10911535" cy="731520"/>
           </a:xfrm>
           <a:prstGeom prst="rect">
             <a:avLst/>
@@ -4639,13 +4397,205 @@
           <a:p>
             <a:pPr algn="ctr"/>
             <a:r>
-              <a:rPr sz="2400" b="0" i="1">
-                <a:solidFill>
-                  <a:srgbClr val="B4B4B4"/>
+              <a:rPr sz="4000" b="1" i="0">
+                <a:solidFill>
+                  <a:srgbClr val="FFFFFF"/>
                 </a:solidFill>
                 <a:latin typeface="Arial"/>
               </a:rPr>
-              <a:t>iesu ha shini mo uchi katsu kami</a:t>
+              <a:t>Cantamos para a glória do Senhor Jesus</a:t>
+            </a:r>
+          </a:p>
+        </p:txBody>
+      </p:sp>
+    </p:spTree>
+  </p:cSld>
+  <p:clrMapOvr>
+    <a:masterClrMapping/>
+  </p:clrMapOvr>
+</p:sld>
+</file>
+
+<file path=ppt/slides/slide18.xml><?xml version="1.0" encoding="utf-8"?>
+<p:sld xmlns:a="http://schemas.openxmlformats.org/drawingml/2006/main" xmlns:p="http://schemas.openxmlformats.org/presentationml/2006/main" xmlns:r="http://schemas.openxmlformats.org/officeDocument/2006/relationships">
+  <p:cSld>
+    <p:bg>
+      <p:bgPr>
+        <a:solidFill>
+          <a:srgbClr val="000000"/>
+        </a:solidFill>
+        <a:effectLst/>
+      </p:bgPr>
+    </p:bg>
+    <p:spTree>
+      <p:nvGrpSpPr>
+        <p:cNvPr id="1" name=""/>
+        <p:cNvGrpSpPr/>
+        <p:nvPr/>
+      </p:nvGrpSpPr>
+      <p:grpSpPr/>
+      <p:sp>
+        <p:nvSpPr>
+          <p:cNvPr id="2" name="TextBox 1"/>
+          <p:cNvSpPr txBox="1"/>
+          <p:nvPr/>
+        </p:nvSpPr>
+        <p:spPr>
+          <a:xfrm>
+            <a:off x="640080" y="2052828"/>
+            <a:ext cx="10911535" cy="731520"/>
+          </a:xfrm>
+          <a:prstGeom prst="rect">
+            <a:avLst/>
+          </a:prstGeom>
+          <a:noFill/>
+        </p:spPr>
+        <p:txBody>
+          <a:bodyPr wrap="square">
+            <a:spAutoFit/>
+          </a:bodyPr>
+          <a:lstStyle/>
+          <a:p>
+            <a:pPr algn="ctr"/>
+            <a:r>
+              <a:rPr sz="4800" b="1" i="0">
+                <a:solidFill>
+                  <a:srgbClr val="FFFFFF"/>
+                </a:solidFill>
+                <a:latin typeface="Arial"/>
+              </a:rPr>
+              <a:t>Possa o mundo ver brilhar a luz</a:t>
+            </a:r>
+          </a:p>
+        </p:txBody>
+      </p:sp>
+      <p:sp>
+        <p:nvSpPr>
+          <p:cNvPr id="3" name="TextBox 2"/>
+          <p:cNvSpPr txBox="1"/>
+          <p:nvPr/>
+        </p:nvSpPr>
+        <p:spPr>
+          <a:xfrm>
+            <a:off x="640080" y="2985516"/>
+            <a:ext cx="10911535" cy="731520"/>
+          </a:xfrm>
+          <a:prstGeom prst="rect">
+            <a:avLst/>
+          </a:prstGeom>
+          <a:noFill/>
+        </p:spPr>
+        <p:txBody>
+          <a:bodyPr wrap="square">
+            <a:spAutoFit/>
+          </a:bodyPr>
+          <a:lstStyle/>
+          <a:p>
+            <a:pPr algn="ctr"/>
+            <a:r>
+              <a:rPr sz="4000" b="1" i="0">
+                <a:solidFill>
+                  <a:srgbClr val="FFFFFF"/>
+                </a:solidFill>
+                <a:latin typeface="Arial"/>
+              </a:rPr>
+              <a:t>Cantamos para a glória do Senhor Jesus</a:t>
+            </a:r>
+          </a:p>
+        </p:txBody>
+      </p:sp>
+    </p:spTree>
+  </p:cSld>
+  <p:clrMapOvr>
+    <a:masterClrMapping/>
+  </p:clrMapOvr>
+</p:sld>
+</file>
+
+<file path=ppt/slides/slide19.xml><?xml version="1.0" encoding="utf-8"?>
+<p:sld xmlns:a="http://schemas.openxmlformats.org/drawingml/2006/main" xmlns:p="http://schemas.openxmlformats.org/presentationml/2006/main" xmlns:r="http://schemas.openxmlformats.org/officeDocument/2006/relationships">
+  <p:cSld>
+    <p:bg>
+      <p:bgPr>
+        <a:solidFill>
+          <a:srgbClr val="000000"/>
+        </a:solidFill>
+        <a:effectLst/>
+      </p:bgPr>
+    </p:bg>
+    <p:spTree>
+      <p:nvGrpSpPr>
+        <p:cNvPr id="1" name=""/>
+        <p:cNvGrpSpPr/>
+        <p:nvPr/>
+      </p:nvGrpSpPr>
+      <p:grpSpPr/>
+      <p:sp>
+        <p:nvSpPr>
+          <p:cNvPr id="2" name="TextBox 1"/>
+          <p:cNvSpPr txBox="1"/>
+          <p:nvPr/>
+        </p:nvSpPr>
+        <p:spPr>
+          <a:xfrm>
+            <a:off x="640080" y="1650492"/>
+            <a:ext cx="10911535" cy="731520"/>
+          </a:xfrm>
+          <a:prstGeom prst="rect">
+            <a:avLst/>
+          </a:prstGeom>
+          <a:noFill/>
+        </p:spPr>
+        <p:txBody>
+          <a:bodyPr wrap="square">
+            <a:spAutoFit/>
+          </a:bodyPr>
+          <a:lstStyle/>
+          <a:p>
+            <a:pPr algn="ctr"/>
+            <a:r>
+              <a:rPr sz="4800" b="1" i="0">
+                <a:solidFill>
+                  <a:srgbClr val="FFFFFF"/>
+                </a:solidFill>
+                <a:latin typeface="Arial"/>
+              </a:rPr>
+              <a:t>主よ救いの神 山も動かす力強さ</a:t>
+            </a:r>
+          </a:p>
+        </p:txBody>
+      </p:sp>
+      <p:sp>
+        <p:nvSpPr>
+          <p:cNvPr id="3" name="TextBox 2"/>
+          <p:cNvSpPr txBox="1"/>
+          <p:nvPr/>
+        </p:nvSpPr>
+        <p:spPr>
+          <a:xfrm>
+            <a:off x="640080" y="2418588"/>
+            <a:ext cx="10911535" cy="365760"/>
+          </a:xfrm>
+          <a:prstGeom prst="rect">
+            <a:avLst/>
+          </a:prstGeom>
+          <a:noFill/>
+        </p:spPr>
+        <p:txBody>
+          <a:bodyPr wrap="square">
+            <a:spAutoFit/>
+          </a:bodyPr>
+          <a:lstStyle/>
+          <a:p>
+            <a:pPr algn="ctr"/>
+            <a:r>
+              <a:rPr sz="2400" b="0" i="1">
+                <a:solidFill>
+                  <a:srgbClr val="AAAAAA"/>
+                </a:solidFill>
+                <a:latin typeface="Arial"/>
+              </a:rPr>
+              <a:t>shu yo sukui no kami yama mo ugoka su chikarazuyosa</a:t>
             </a:r>
           </a:p>
         </p:txBody>
@@ -4658,8 +4608,8 @@
         </p:nvSpPr>
         <p:spPr>
           <a:xfrm>
-            <a:off x="594360" y="3826764"/>
-            <a:ext cx="11002975" cy="347472"/>
+            <a:off x="640080" y="2985516"/>
+            <a:ext cx="10911535" cy="731520"/>
           </a:xfrm>
           <a:prstGeom prst="rect">
             <a:avLst/>
@@ -4674,13 +4624,118 @@
           <a:p>
             <a:pPr algn="ctr"/>
             <a:r>
-              <a:rPr sz="2000" b="0" i="1">
-                <a:solidFill>
-                  <a:srgbClr val="8C8C8C"/>
+              <a:rPr sz="4800" b="1" i="0">
+                <a:solidFill>
+                  <a:srgbClr val="FFFFFF"/>
                 </a:solidFill>
                 <a:latin typeface="Arial"/>
               </a:rPr>
-              <a:t/>
+              <a:t>救い生み出す主よ</a:t>
+            </a:r>
+          </a:p>
+        </p:txBody>
+      </p:sp>
+      <p:sp>
+        <p:nvSpPr>
+          <p:cNvPr id="5" name="TextBox 4"/>
+          <p:cNvSpPr txBox="1"/>
+          <p:nvPr/>
+        </p:nvSpPr>
+        <p:spPr>
+          <a:xfrm>
+            <a:off x="640080" y="3753612"/>
+            <a:ext cx="10911535" cy="365760"/>
+          </a:xfrm>
+          <a:prstGeom prst="rect">
+            <a:avLst/>
+          </a:prstGeom>
+          <a:noFill/>
+        </p:spPr>
+        <p:txBody>
+          <a:bodyPr wrap="square">
+            <a:spAutoFit/>
+          </a:bodyPr>
+          <a:lstStyle/>
+          <a:p>
+            <a:pPr algn="ctr"/>
+            <a:r>
+              <a:rPr sz="2400" b="0" i="1">
+                <a:solidFill>
+                  <a:srgbClr val="AAAAAA"/>
+                </a:solidFill>
+                <a:latin typeface="Arial"/>
+              </a:rPr>
+              <a:t>sukui umidasu shu yo</a:t>
+            </a:r>
+          </a:p>
+        </p:txBody>
+      </p:sp>
+      <p:sp>
+        <p:nvSpPr>
+          <p:cNvPr id="6" name="TextBox 5"/>
+          <p:cNvSpPr txBox="1"/>
+          <p:nvPr/>
+        </p:nvSpPr>
+        <p:spPr>
+          <a:xfrm>
+            <a:off x="640080" y="4530852"/>
+            <a:ext cx="10911535" cy="310896"/>
+          </a:xfrm>
+          <a:prstGeom prst="rect">
+            <a:avLst/>
+          </a:prstGeom>
+          <a:noFill/>
+        </p:spPr>
+        <p:txBody>
+          <a:bodyPr wrap="square">
+            <a:spAutoFit/>
+          </a:bodyPr>
+          <a:lstStyle/>
+          <a:p>
+            <a:pPr algn="ctr"/>
+            <a:r>
+              <a:rPr sz="2000" b="0" i="1">
+                <a:solidFill>
+                  <a:srgbClr val="828282"/>
+                </a:solidFill>
+                <a:latin typeface="Arial"/>
+              </a:rPr>
+              <a:t>Tem poder pra salvar.</a:t>
+            </a:r>
+          </a:p>
+        </p:txBody>
+      </p:sp>
+      <p:sp>
+        <p:nvSpPr>
+          <p:cNvPr id="7" name="TextBox 6"/>
+          <p:cNvSpPr txBox="1"/>
+          <p:nvPr/>
+        </p:nvSpPr>
+        <p:spPr>
+          <a:xfrm>
+            <a:off x="640080" y="4896612"/>
+            <a:ext cx="10911535" cy="310896"/>
+          </a:xfrm>
+          <a:prstGeom prst="rect">
+            <a:avLst/>
+          </a:prstGeom>
+          <a:noFill/>
+        </p:spPr>
+        <p:txBody>
+          <a:bodyPr wrap="square">
+            <a:spAutoFit/>
+          </a:bodyPr>
+          <a:lstStyle/>
+          <a:p>
+            <a:pPr algn="ctr"/>
+            <a:r>
+              <a:rPr sz="2000" b="0" i="1">
+                <a:solidFill>
+                  <a:srgbClr val="828282"/>
+                </a:solidFill>
+                <a:latin typeface="Arial"/>
+              </a:rPr>
+              <a:t>Pra sempre autor da salvação</a:t>
             </a:r>
           </a:p>
         </p:txBody>
@@ -4719,8 +4774,8 @@
         </p:nvSpPr>
         <p:spPr>
           <a:xfrm>
-            <a:off x="594360" y="2258568"/>
-            <a:ext cx="11002975" cy="685800"/>
+            <a:off x="640080" y="2052828"/>
+            <a:ext cx="10911535" cy="731520"/>
           </a:xfrm>
           <a:prstGeom prst="rect">
             <a:avLst/>
@@ -4735,7 +4790,7 @@
           <a:p>
             <a:pPr algn="ctr"/>
             <a:r>
-              <a:rPr sz="3805" b="1" i="0">
+              <a:rPr sz="4100" b="1" i="0">
                 <a:solidFill>
                   <a:srgbClr val="FFFFFF"/>
                 </a:solidFill>
@@ -4754,8 +4809,8 @@
         </p:nvSpPr>
         <p:spPr>
           <a:xfrm>
-            <a:off x="594360" y="2980944"/>
-            <a:ext cx="11002975" cy="347472"/>
+            <a:off x="640080" y="2985516"/>
+            <a:ext cx="10911535" cy="731520"/>
           </a:xfrm>
           <a:prstGeom prst="rect">
             <a:avLst/>
@@ -4770,13 +4825,109 @@
           <a:p>
             <a:pPr algn="ctr"/>
             <a:r>
-              <a:rPr sz="2200" b="0" i="1">
-                <a:solidFill>
-                  <a:srgbClr val="8C8C8C"/>
+              <a:rPr sz="4800" b="1" i="0">
+                <a:solidFill>
+                  <a:srgbClr val="FFFFFF"/>
                 </a:solidFill>
                 <a:latin typeface="Arial"/>
               </a:rPr>
-              <a:t/>
+              <a:t>De um Deus que salva</a:t>
+            </a:r>
+          </a:p>
+        </p:txBody>
+      </p:sp>
+    </p:spTree>
+  </p:cSld>
+  <p:clrMapOvr>
+    <a:masterClrMapping/>
+  </p:clrMapOvr>
+</p:sld>
+</file>
+
+<file path=ppt/slides/slide20.xml><?xml version="1.0" encoding="utf-8"?>
+<p:sld xmlns:a="http://schemas.openxmlformats.org/drawingml/2006/main" xmlns:p="http://schemas.openxmlformats.org/presentationml/2006/main" xmlns:r="http://schemas.openxmlformats.org/officeDocument/2006/relationships">
+  <p:cSld>
+    <p:bg>
+      <p:bgPr>
+        <a:solidFill>
+          <a:srgbClr val="000000"/>
+        </a:solidFill>
+        <a:effectLst/>
+      </p:bgPr>
+    </p:bg>
+    <p:spTree>
+      <p:nvGrpSpPr>
+        <p:cNvPr id="1" name=""/>
+        <p:cNvGrpSpPr/>
+        <p:nvPr/>
+      </p:nvGrpSpPr>
+      <p:grpSpPr/>
+      <p:sp>
+        <p:nvSpPr>
+          <p:cNvPr id="2" name="TextBox 1"/>
+          <p:cNvSpPr txBox="1"/>
+          <p:nvPr/>
+        </p:nvSpPr>
+        <p:spPr>
+          <a:xfrm>
+            <a:off x="640080" y="2500884"/>
+            <a:ext cx="10911535" cy="731520"/>
+          </a:xfrm>
+          <a:prstGeom prst="rect">
+            <a:avLst/>
+          </a:prstGeom>
+          <a:noFill/>
+        </p:spPr>
+        <p:txBody>
+          <a:bodyPr wrap="square">
+            <a:spAutoFit/>
+          </a:bodyPr>
+          <a:lstStyle/>
+          <a:p>
+            <a:pPr algn="ctr"/>
+            <a:r>
+              <a:rPr sz="4800" b="1" i="0">
+                <a:solidFill>
+                  <a:srgbClr val="FFFFFF"/>
+                </a:solidFill>
+                <a:latin typeface="Arial"/>
+              </a:rPr>
+              <a:t>イエスは死にも打ち勝つ神</a:t>
+            </a:r>
+          </a:p>
+        </p:txBody>
+      </p:sp>
+      <p:sp>
+        <p:nvSpPr>
+          <p:cNvPr id="3" name="TextBox 2"/>
+          <p:cNvSpPr txBox="1"/>
+          <p:nvPr/>
+        </p:nvSpPr>
+        <p:spPr>
+          <a:xfrm>
+            <a:off x="640080" y="3268980"/>
+            <a:ext cx="10911535" cy="365760"/>
+          </a:xfrm>
+          <a:prstGeom prst="rect">
+            <a:avLst/>
+          </a:prstGeom>
+          <a:noFill/>
+        </p:spPr>
+        <p:txBody>
+          <a:bodyPr wrap="square">
+            <a:spAutoFit/>
+          </a:bodyPr>
+          <a:lstStyle/>
+          <a:p>
+            <a:pPr algn="ctr"/>
+            <a:r>
+              <a:rPr sz="2400" b="0" i="1">
+                <a:solidFill>
+                  <a:srgbClr val="AAAAAA"/>
+                </a:solidFill>
+                <a:latin typeface="Arial"/>
+              </a:rPr>
+              <a:t>iesu ha shini mo uchi katsu kami</a:t>
             </a:r>
           </a:p>
         </p:txBody>
@@ -4789,8 +4940,8 @@
         </p:nvSpPr>
         <p:spPr>
           <a:xfrm>
-            <a:off x="594360" y="3529584"/>
-            <a:ext cx="11002975" cy="685800"/>
+            <a:off x="640080" y="4046220"/>
+            <a:ext cx="10911535" cy="310896"/>
           </a:xfrm>
           <a:prstGeom prst="rect">
             <a:avLst/>
@@ -4805,48 +4956,13 @@
           <a:p>
             <a:pPr algn="ctr"/>
             <a:r>
-              <a:rPr sz="4400" b="1" i="0">
-                <a:solidFill>
-                  <a:srgbClr val="FFFFFF"/>
+              <a:rPr sz="2000" b="0" i="1">
+                <a:solidFill>
+                  <a:srgbClr val="828282"/>
                 </a:solidFill>
                 <a:latin typeface="Arial"/>
               </a:rPr>
-              <a:t>De um Deus que salva</a:t>
-            </a:r>
-          </a:p>
-        </p:txBody>
-      </p:sp>
-      <p:sp>
-        <p:nvSpPr>
-          <p:cNvPr id="5" name="TextBox 4"/>
-          <p:cNvSpPr txBox="1"/>
-          <p:nvPr/>
-        </p:nvSpPr>
-        <p:spPr>
-          <a:xfrm>
-            <a:off x="594360" y="4251960"/>
-            <a:ext cx="11002975" cy="347472"/>
-          </a:xfrm>
-          <a:prstGeom prst="rect">
-            <a:avLst/>
-          </a:prstGeom>
-          <a:noFill/>
-        </p:spPr>
-        <p:txBody>
-          <a:bodyPr wrap="square">
-            <a:spAutoFit/>
-          </a:bodyPr>
-          <a:lstStyle/>
-          <a:p>
-            <a:pPr algn="ctr"/>
-            <a:r>
-              <a:rPr sz="2200" b="0" i="1">
-                <a:solidFill>
-                  <a:srgbClr val="8C8C8C"/>
-                </a:solidFill>
-                <a:latin typeface="Arial"/>
-              </a:rPr>
-              <a:t/>
+              <a:t>Jesus a morte venceu, sobre a morte venceu.</a:t>
             </a:r>
           </a:p>
         </p:txBody>
@@ -4885,8 +5001,8 @@
         </p:nvSpPr>
         <p:spPr>
           <a:xfrm>
-            <a:off x="594360" y="2258568"/>
-            <a:ext cx="11002975" cy="685800"/>
+            <a:off x="640080" y="2052828"/>
+            <a:ext cx="10911535" cy="731520"/>
           </a:xfrm>
           <a:prstGeom prst="rect">
             <a:avLst/>
@@ -4901,7 +5017,7 @@
           <a:p>
             <a:pPr algn="ctr"/>
             <a:r>
-              <a:rPr sz="4400" b="1" i="0">
+              <a:rPr sz="4800" b="1" i="0">
                 <a:solidFill>
                   <a:srgbClr val="FFFFFF"/>
                 </a:solidFill>
@@ -4920,8 +5036,8 @@
         </p:nvSpPr>
         <p:spPr>
           <a:xfrm>
-            <a:off x="594360" y="2980944"/>
-            <a:ext cx="11002975" cy="347472"/>
+            <a:off x="640080" y="2985516"/>
+            <a:ext cx="10911535" cy="731520"/>
           </a:xfrm>
           <a:prstGeom prst="rect">
             <a:avLst/>
@@ -4936,83 +5052,13 @@
           <a:p>
             <a:pPr algn="ctr"/>
             <a:r>
-              <a:rPr sz="2200" b="0" i="1">
-                <a:solidFill>
-                  <a:srgbClr val="8C8C8C"/>
-                </a:solidFill>
-                <a:latin typeface="Arial"/>
-              </a:rPr>
-              <a:t/>
-            </a:r>
-          </a:p>
-        </p:txBody>
-      </p:sp>
-      <p:sp>
-        <p:nvSpPr>
-          <p:cNvPr id="4" name="TextBox 3"/>
-          <p:cNvSpPr txBox="1"/>
-          <p:nvPr/>
-        </p:nvSpPr>
-        <p:spPr>
-          <a:xfrm>
-            <a:off x="594360" y="3529584"/>
-            <a:ext cx="11002975" cy="685800"/>
-          </a:xfrm>
-          <a:prstGeom prst="rect">
-            <a:avLst/>
-          </a:prstGeom>
-          <a:noFill/>
-        </p:spPr>
-        <p:txBody>
-          <a:bodyPr wrap="square">
-            <a:spAutoFit/>
-          </a:bodyPr>
-          <a:lstStyle/>
-          <a:p>
-            <a:pPr algn="ctr"/>
-            <a:r>
-              <a:rPr sz="4400" b="1" i="0">
+              <a:rPr sz="4800" b="1" i="0">
                 <a:solidFill>
                   <a:srgbClr val="FFFFFF"/>
                 </a:solidFill>
                 <a:latin typeface="Arial"/>
               </a:rPr>
               <a:t>E tem poder pra salvar</a:t>
-            </a:r>
-          </a:p>
-        </p:txBody>
-      </p:sp>
-      <p:sp>
-        <p:nvSpPr>
-          <p:cNvPr id="5" name="TextBox 4"/>
-          <p:cNvSpPr txBox="1"/>
-          <p:nvPr/>
-        </p:nvSpPr>
-        <p:spPr>
-          <a:xfrm>
-            <a:off x="594360" y="4251960"/>
-            <a:ext cx="11002975" cy="347472"/>
-          </a:xfrm>
-          <a:prstGeom prst="rect">
-            <a:avLst/>
-          </a:prstGeom>
-          <a:noFill/>
-        </p:spPr>
-        <p:txBody>
-          <a:bodyPr wrap="square">
-            <a:spAutoFit/>
-          </a:bodyPr>
-          <a:lstStyle/>
-          <a:p>
-            <a:pPr algn="ctr"/>
-            <a:r>
-              <a:rPr sz="2200" b="0" i="1">
-                <a:solidFill>
-                  <a:srgbClr val="8C8C8C"/>
-                </a:solidFill>
-                <a:latin typeface="Arial"/>
-              </a:rPr>
-              <a:t/>
             </a:r>
           </a:p>
         </p:txBody>
@@ -5051,8 +5097,8 @@
         </p:nvSpPr>
         <p:spPr>
           <a:xfrm>
-            <a:off x="594360" y="2258568"/>
-            <a:ext cx="11002975" cy="685800"/>
+            <a:off x="640080" y="2052828"/>
+            <a:ext cx="10911535" cy="731520"/>
           </a:xfrm>
           <a:prstGeom prst="rect">
             <a:avLst/>
@@ -5067,13 +5113,13 @@
           <a:p>
             <a:pPr algn="ctr"/>
             <a:r>
-              <a:rPr sz="4400" b="1" i="0">
+              <a:rPr sz="4100" b="1" i="0">
                 <a:solidFill>
                   <a:srgbClr val="FFFFFF"/>
                 </a:solidFill>
                 <a:latin typeface="Arial"/>
               </a:rPr>
-              <a:t>Tem poder pra salvar.</a:t>
+              <a:t>Todos necessitam de um amor perfeito,</a:t>
             </a:r>
           </a:p>
         </p:txBody>
@@ -5086,8 +5132,8 @@
         </p:nvSpPr>
         <p:spPr>
           <a:xfrm>
-            <a:off x="594360" y="2980944"/>
-            <a:ext cx="11002975" cy="347472"/>
+            <a:off x="640080" y="2985516"/>
+            <a:ext cx="10911535" cy="731520"/>
           </a:xfrm>
           <a:prstGeom prst="rect">
             <a:avLst/>
@@ -5102,83 +5148,13 @@
           <a:p>
             <a:pPr algn="ctr"/>
             <a:r>
-              <a:rPr sz="2200" b="0" i="1">
-                <a:solidFill>
-                  <a:srgbClr val="8C8C8C"/>
+              <a:rPr sz="4800" b="1" i="0">
+                <a:solidFill>
+                  <a:srgbClr val="FFFFFF"/>
                 </a:solidFill>
                 <a:latin typeface="Arial"/>
               </a:rPr>
-              <a:t/>
-            </a:r>
-          </a:p>
-        </p:txBody>
-      </p:sp>
-      <p:sp>
-        <p:nvSpPr>
-          <p:cNvPr id="4" name="TextBox 3"/>
-          <p:cNvSpPr txBox="1"/>
-          <p:nvPr/>
-        </p:nvSpPr>
-        <p:spPr>
-          <a:xfrm>
-            <a:off x="594360" y="3529584"/>
-            <a:ext cx="11002975" cy="685800"/>
-          </a:xfrm>
-          <a:prstGeom prst="rect">
-            <a:avLst/>
-          </a:prstGeom>
-          <a:noFill/>
-        </p:spPr>
-        <p:txBody>
-          <a:bodyPr wrap="square">
-            <a:spAutoFit/>
-          </a:bodyPr>
-          <a:lstStyle/>
-          <a:p>
-            <a:pPr algn="ctr"/>
-            <a:r>
-              <a:rPr sz="4400" b="1" i="0">
-                <a:solidFill>
-                  <a:srgbClr val="FFFFFF"/>
-                </a:solidFill>
-                <a:latin typeface="Arial"/>
-              </a:rPr>
-              <a:t>Pra sempre autor da salvação</a:t>
-            </a:r>
-          </a:p>
-        </p:txBody>
-      </p:sp>
-      <p:sp>
-        <p:nvSpPr>
-          <p:cNvPr id="5" name="TextBox 4"/>
-          <p:cNvSpPr txBox="1"/>
-          <p:nvPr/>
-        </p:nvSpPr>
-        <p:spPr>
-          <a:xfrm>
-            <a:off x="594360" y="4251960"/>
-            <a:ext cx="11002975" cy="347472"/>
-          </a:xfrm>
-          <a:prstGeom prst="rect">
-            <a:avLst/>
-          </a:prstGeom>
-          <a:noFill/>
-        </p:spPr>
-        <p:txBody>
-          <a:bodyPr wrap="square">
-            <a:spAutoFit/>
-          </a:bodyPr>
-          <a:lstStyle/>
-          <a:p>
-            <a:pPr algn="ctr"/>
-            <a:r>
-              <a:rPr sz="2200" b="0" i="1">
-                <a:solidFill>
-                  <a:srgbClr val="8C8C8C"/>
-                </a:solidFill>
-                <a:latin typeface="Arial"/>
-              </a:rPr>
-              <a:t/>
+              <a:t>Perdão e compaixão</a:t>
             </a:r>
           </a:p>
         </p:txBody>
@@ -5217,8 +5193,8 @@
         </p:nvSpPr>
         <p:spPr>
           <a:xfrm>
-            <a:off x="594360" y="2258568"/>
-            <a:ext cx="11002975" cy="685800"/>
+            <a:off x="640080" y="2052828"/>
+            <a:ext cx="10911535" cy="731520"/>
           </a:xfrm>
           <a:prstGeom prst="rect">
             <a:avLst/>
@@ -5233,13 +5209,13 @@
           <a:p>
             <a:pPr algn="ctr"/>
             <a:r>
-              <a:rPr sz="3274" b="1" i="0">
+              <a:rPr sz="4100" b="1" i="0">
                 <a:solidFill>
                   <a:srgbClr val="FFFFFF"/>
                 </a:solidFill>
                 <a:latin typeface="Arial"/>
               </a:rPr>
-              <a:t>Jesus a morte venceu, sobre a morte venceu.</a:t>
+              <a:t>Todos necessitam de graça e esperança</a:t>
             </a:r>
           </a:p>
         </p:txBody>
@@ -5252,8 +5228,8 @@
         </p:nvSpPr>
         <p:spPr>
           <a:xfrm>
-            <a:off x="594360" y="2980944"/>
-            <a:ext cx="11002975" cy="347472"/>
+            <a:off x="640080" y="2985516"/>
+            <a:ext cx="10911535" cy="731520"/>
           </a:xfrm>
           <a:prstGeom prst="rect">
             <a:avLst/>
@@ -5268,83 +5244,13 @@
           <a:p>
             <a:pPr algn="ctr"/>
             <a:r>
-              <a:rPr sz="2200" b="0" i="1">
-                <a:solidFill>
-                  <a:srgbClr val="8C8C8C"/>
+              <a:rPr sz="4800" b="1" i="0">
+                <a:solidFill>
+                  <a:srgbClr val="FFFFFF"/>
                 </a:solidFill>
                 <a:latin typeface="Arial"/>
               </a:rPr>
-              <a:t/>
-            </a:r>
-          </a:p>
-        </p:txBody>
-      </p:sp>
-      <p:sp>
-        <p:nvSpPr>
-          <p:cNvPr id="4" name="TextBox 3"/>
-          <p:cNvSpPr txBox="1"/>
-          <p:nvPr/>
-        </p:nvSpPr>
-        <p:spPr>
-          <a:xfrm>
-            <a:off x="594360" y="3529584"/>
-            <a:ext cx="11002975" cy="685800"/>
-          </a:xfrm>
-          <a:prstGeom prst="rect">
-            <a:avLst/>
-          </a:prstGeom>
-          <a:noFill/>
-        </p:spPr>
-        <p:txBody>
-          <a:bodyPr wrap="square">
-            <a:spAutoFit/>
-          </a:bodyPr>
-          <a:lstStyle/>
-          <a:p>
-            <a:pPr algn="ctr"/>
-            <a:r>
-              <a:rPr sz="3274" b="1" i="0">
-                <a:solidFill>
-                  <a:srgbClr val="FFFFFF"/>
-                </a:solidFill>
-                <a:latin typeface="Arial"/>
-              </a:rPr>
-              <a:t>Me aceitas com meus medos, falhas e temores</a:t>
-            </a:r>
-          </a:p>
-        </p:txBody>
-      </p:sp>
-      <p:sp>
-        <p:nvSpPr>
-          <p:cNvPr id="5" name="TextBox 4"/>
-          <p:cNvSpPr txBox="1"/>
-          <p:nvPr/>
-        </p:nvSpPr>
-        <p:spPr>
-          <a:xfrm>
-            <a:off x="594360" y="4251960"/>
-            <a:ext cx="11002975" cy="347472"/>
-          </a:xfrm>
-          <a:prstGeom prst="rect">
-            <a:avLst/>
-          </a:prstGeom>
-          <a:noFill/>
-        </p:spPr>
-        <p:txBody>
-          <a:bodyPr wrap="square">
-            <a:spAutoFit/>
-          </a:bodyPr>
-          <a:lstStyle/>
-          <a:p>
-            <a:pPr algn="ctr"/>
-            <a:r>
-              <a:rPr sz="2200" b="0" i="1">
-                <a:solidFill>
-                  <a:srgbClr val="8C8C8C"/>
-                </a:solidFill>
-                <a:latin typeface="Arial"/>
-              </a:rPr>
-              <a:t/>
+              <a:t>De um Deus que salva</a:t>
             </a:r>
           </a:p>
         </p:txBody>
@@ -5383,8 +5289,8 @@
         </p:nvSpPr>
         <p:spPr>
           <a:xfrm>
-            <a:off x="594360" y="2258568"/>
-            <a:ext cx="11002975" cy="685800"/>
+            <a:off x="640080" y="2052828"/>
+            <a:ext cx="10911535" cy="731520"/>
           </a:xfrm>
           <a:prstGeom prst="rect">
             <a:avLst/>
@@ -5399,13 +5305,13 @@
           <a:p>
             <a:pPr algn="ctr"/>
             <a:r>
-              <a:rPr sz="4400" b="1" i="0">
+              <a:rPr sz="4800" b="1" i="0">
                 <a:solidFill>
                   <a:srgbClr val="FFFFFF"/>
                 </a:solidFill>
                 <a:latin typeface="Arial"/>
               </a:rPr>
-              <a:t>Enche o meu viver</a:t>
+              <a:t>Cristo, move as montanhas</a:t>
             </a:r>
           </a:p>
         </p:txBody>
@@ -5418,8 +5324,8 @@
         </p:nvSpPr>
         <p:spPr>
           <a:xfrm>
-            <a:off x="594360" y="2980944"/>
-            <a:ext cx="11002975" cy="347472"/>
+            <a:off x="640080" y="2985516"/>
+            <a:ext cx="10911535" cy="731520"/>
           </a:xfrm>
           <a:prstGeom prst="rect">
             <a:avLst/>
@@ -5434,83 +5340,13 @@
           <a:p>
             <a:pPr algn="ctr"/>
             <a:r>
-              <a:rPr sz="2200" b="0" i="1">
-                <a:solidFill>
-                  <a:srgbClr val="8C8C8C"/>
+              <a:rPr sz="4800" b="1" i="0">
+                <a:solidFill>
+                  <a:srgbClr val="FFFFFF"/>
                 </a:solidFill>
                 <a:latin typeface="Arial"/>
               </a:rPr>
-              <a:t/>
-            </a:r>
-          </a:p>
-        </p:txBody>
-      </p:sp>
-      <p:sp>
-        <p:nvSpPr>
-          <p:cNvPr id="4" name="TextBox 3"/>
-          <p:cNvSpPr txBox="1"/>
-          <p:nvPr/>
-        </p:nvSpPr>
-        <p:spPr>
-          <a:xfrm>
-            <a:off x="594360" y="3529584"/>
-            <a:ext cx="11002975" cy="685800"/>
-          </a:xfrm>
-          <a:prstGeom prst="rect">
-            <a:avLst/>
-          </a:prstGeom>
-          <a:noFill/>
-        </p:spPr>
-        <p:txBody>
-          <a:bodyPr wrap="square">
-            <a:spAutoFit/>
-          </a:bodyPr>
-          <a:lstStyle/>
-          <a:p>
-            <a:pPr algn="ctr"/>
-            <a:r>
-              <a:rPr sz="3274" b="1" i="0">
-                <a:solidFill>
-                  <a:srgbClr val="FFFFFF"/>
-                </a:solidFill>
-                <a:latin typeface="Arial"/>
-              </a:rPr>
-              <a:t>A minha vida entrego pra seguir teus passos</a:t>
-            </a:r>
-          </a:p>
-        </p:txBody>
-      </p:sp>
-      <p:sp>
-        <p:nvSpPr>
-          <p:cNvPr id="5" name="TextBox 4"/>
-          <p:cNvSpPr txBox="1"/>
-          <p:nvPr/>
-        </p:nvSpPr>
-        <p:spPr>
-          <a:xfrm>
-            <a:off x="594360" y="4251960"/>
-            <a:ext cx="11002975" cy="347472"/>
-          </a:xfrm>
-          <a:prstGeom prst="rect">
-            <a:avLst/>
-          </a:prstGeom>
-          <a:noFill/>
-        </p:spPr>
-        <p:txBody>
-          <a:bodyPr wrap="square">
-            <a:spAutoFit/>
-          </a:bodyPr>
-          <a:lstStyle/>
-          <a:p>
-            <a:pPr algn="ctr"/>
-            <a:r>
-              <a:rPr sz="2200" b="0" i="1">
-                <a:solidFill>
-                  <a:srgbClr val="8C8C8C"/>
-                </a:solidFill>
-                <a:latin typeface="Arial"/>
-              </a:rPr>
-              <a:t/>
+              <a:t>E tem poder pra salvar</a:t>
             </a:r>
           </a:p>
         </p:txBody>
@@ -5549,8 +5385,8 @@
         </p:nvSpPr>
         <p:spPr>
           <a:xfrm>
-            <a:off x="594360" y="1837944"/>
-            <a:ext cx="11002975" cy="685800"/>
+            <a:off x="640080" y="2052828"/>
+            <a:ext cx="10911535" cy="731520"/>
           </a:xfrm>
           <a:prstGeom prst="rect">
             <a:avLst/>
@@ -5565,13 +5401,13 @@
           <a:p>
             <a:pPr algn="ctr"/>
             <a:r>
-              <a:rPr sz="4400" b="1" i="0">
+              <a:rPr sz="4800" b="1" i="0">
                 <a:solidFill>
                   <a:srgbClr val="FFFFFF"/>
                 </a:solidFill>
                 <a:latin typeface="Arial"/>
               </a:rPr>
-              <a:t>私のすべてを受け入れ再び みたされる</a:t>
+              <a:t>Tem poder pra salvar.</a:t>
             </a:r>
           </a:p>
         </p:txBody>
@@ -5584,8 +5420,8 @@
         </p:nvSpPr>
         <p:spPr>
           <a:xfrm>
-            <a:off x="594360" y="2560320"/>
-            <a:ext cx="11002975" cy="384048"/>
+            <a:off x="640080" y="2985516"/>
+            <a:ext cx="10911535" cy="731520"/>
           </a:xfrm>
           <a:prstGeom prst="rect">
             <a:avLst/>
@@ -5600,153 +5436,13 @@
           <a:p>
             <a:pPr algn="ctr"/>
             <a:r>
-              <a:rPr sz="2191" b="0" i="1">
-                <a:solidFill>
-                  <a:srgbClr val="B4B4B4"/>
+              <a:rPr sz="4800" b="1" i="0">
+                <a:solidFill>
+                  <a:srgbClr val="FFFFFF"/>
                 </a:solidFill>
                 <a:latin typeface="Arial"/>
               </a:rPr>
-              <a:t>watashi no subete wo ukeirefutatabi mitasareru</a:t>
-            </a:r>
-          </a:p>
-        </p:txBody>
-      </p:sp>
-      <p:sp>
-        <p:nvSpPr>
-          <p:cNvPr id="4" name="TextBox 3"/>
-          <p:cNvSpPr txBox="1"/>
-          <p:nvPr/>
-        </p:nvSpPr>
-        <p:spPr>
-          <a:xfrm>
-            <a:off x="594360" y="2980944"/>
-            <a:ext cx="11002975" cy="347472"/>
-          </a:xfrm>
-          <a:prstGeom prst="rect">
-            <a:avLst/>
-          </a:prstGeom>
-          <a:noFill/>
-        </p:spPr>
-        <p:txBody>
-          <a:bodyPr wrap="square">
-            <a:spAutoFit/>
-          </a:bodyPr>
-          <a:lstStyle/>
-          <a:p>
-            <a:pPr algn="ctr"/>
-            <a:r>
-              <a:rPr sz="2000" b="0" i="1">
-                <a:solidFill>
-                  <a:srgbClr val="8C8C8C"/>
-                </a:solidFill>
-                <a:latin typeface="Arial"/>
-              </a:rPr>
-              <a:t/>
-            </a:r>
-          </a:p>
-        </p:txBody>
-      </p:sp>
-      <p:sp>
-        <p:nvSpPr>
-          <p:cNvPr id="5" name="TextBox 4"/>
-          <p:cNvSpPr txBox="1"/>
-          <p:nvPr/>
-        </p:nvSpPr>
-        <p:spPr>
-          <a:xfrm>
-            <a:off x="594360" y="3529584"/>
-            <a:ext cx="11002975" cy="685800"/>
-          </a:xfrm>
-          <a:prstGeom prst="rect">
-            <a:avLst/>
-          </a:prstGeom>
-          <a:noFill/>
-        </p:spPr>
-        <p:txBody>
-          <a:bodyPr wrap="square">
-            <a:spAutoFit/>
-          </a:bodyPr>
-          <a:lstStyle/>
-          <a:p>
-            <a:pPr algn="ctr"/>
-            <a:r>
-              <a:rPr sz="4400" b="1" i="0">
-                <a:solidFill>
-                  <a:srgbClr val="FFFFFF"/>
-                </a:solidFill>
-                <a:latin typeface="Arial"/>
-              </a:rPr>
-              <a:t>命をささげてついてゆきたい</a:t>
-            </a:r>
-          </a:p>
-        </p:txBody>
-      </p:sp>
-      <p:sp>
-        <p:nvSpPr>
-          <p:cNvPr id="6" name="TextBox 5"/>
-          <p:cNvSpPr txBox="1"/>
-          <p:nvPr/>
-        </p:nvSpPr>
-        <p:spPr>
-          <a:xfrm>
-            <a:off x="594360" y="4251960"/>
-            <a:ext cx="11002975" cy="384048"/>
-          </a:xfrm>
-          <a:prstGeom prst="rect">
-            <a:avLst/>
-          </a:prstGeom>
-          <a:noFill/>
-        </p:spPr>
-        <p:txBody>
-          <a:bodyPr wrap="square">
-            <a:spAutoFit/>
-          </a:bodyPr>
-          <a:lstStyle/>
-          <a:p>
-            <a:pPr algn="ctr"/>
-            <a:r>
-              <a:rPr sz="2400" b="0" i="1">
-                <a:solidFill>
-                  <a:srgbClr val="B4B4B4"/>
-                </a:solidFill>
-                <a:latin typeface="Arial"/>
-              </a:rPr>
-              <a:t>inochi wo sasagete tsuite yukitai</a:t>
-            </a:r>
-          </a:p>
-        </p:txBody>
-      </p:sp>
-      <p:sp>
-        <p:nvSpPr>
-          <p:cNvPr id="7" name="TextBox 6"/>
-          <p:cNvSpPr txBox="1"/>
-          <p:nvPr/>
-        </p:nvSpPr>
-        <p:spPr>
-          <a:xfrm>
-            <a:off x="594360" y="4672584"/>
-            <a:ext cx="11002975" cy="347472"/>
-          </a:xfrm>
-          <a:prstGeom prst="rect">
-            <a:avLst/>
-          </a:prstGeom>
-          <a:noFill/>
-        </p:spPr>
-        <p:txBody>
-          <a:bodyPr wrap="square">
-            <a:spAutoFit/>
-          </a:bodyPr>
-          <a:lstStyle/>
-          <a:p>
-            <a:pPr algn="ctr"/>
-            <a:r>
-              <a:rPr sz="2000" b="0" i="1">
-                <a:solidFill>
-                  <a:srgbClr val="8C8C8C"/>
-                </a:solidFill>
-                <a:latin typeface="Arial"/>
-              </a:rPr>
-              <a:t/>
+              <a:t>Pra sempre autor da salvação</a:t>
             </a:r>
           </a:p>
         </p:txBody>
@@ -5785,8 +5481,8 @@
         </p:nvSpPr>
         <p:spPr>
           <a:xfrm>
-            <a:off x="594360" y="2683764"/>
-            <a:ext cx="11002975" cy="685800"/>
+            <a:off x="640080" y="2052828"/>
+            <a:ext cx="10911535" cy="731520"/>
           </a:xfrm>
           <a:prstGeom prst="rect">
             <a:avLst/>
@@ -5801,13 +5497,13 @@
           <a:p>
             <a:pPr algn="ctr"/>
             <a:r>
-              <a:rPr sz="4400" b="1" i="0">
+              <a:rPr sz="3500" b="1" i="0">
                 <a:solidFill>
                   <a:srgbClr val="FFFFFF"/>
                 </a:solidFill>
                 <a:latin typeface="Arial"/>
               </a:rPr>
-              <a:t>すべて委ね</a:t>
+              <a:t>Jesus a morte venceu, sobre a morte venceu.</a:t>
             </a:r>
           </a:p>
         </p:txBody>
@@ -5820,8 +5516,8 @@
         </p:nvSpPr>
         <p:spPr>
           <a:xfrm>
-            <a:off x="594360" y="3406140"/>
-            <a:ext cx="11002975" cy="384048"/>
+            <a:off x="640080" y="2985516"/>
+            <a:ext cx="10911535" cy="731520"/>
           </a:xfrm>
           <a:prstGeom prst="rect">
             <a:avLst/>
@@ -5836,48 +5532,13 @@
           <a:p>
             <a:pPr algn="ctr"/>
             <a:r>
-              <a:rPr sz="2400" b="0" i="1">
-                <a:solidFill>
-                  <a:srgbClr val="B4B4B4"/>
+              <a:rPr sz="3500" b="1" i="0">
+                <a:solidFill>
+                  <a:srgbClr val="FFFFFF"/>
                 </a:solidFill>
                 <a:latin typeface="Arial"/>
               </a:rPr>
-              <a:t>subete yudane</a:t>
-            </a:r>
-          </a:p>
-        </p:txBody>
-      </p:sp>
-      <p:sp>
-        <p:nvSpPr>
-          <p:cNvPr id="4" name="TextBox 3"/>
-          <p:cNvSpPr txBox="1"/>
-          <p:nvPr/>
-        </p:nvSpPr>
-        <p:spPr>
-          <a:xfrm>
-            <a:off x="594360" y="3826764"/>
-            <a:ext cx="11002975" cy="347472"/>
-          </a:xfrm>
-          <a:prstGeom prst="rect">
-            <a:avLst/>
-          </a:prstGeom>
-          <a:noFill/>
-        </p:spPr>
-        <p:txBody>
-          <a:bodyPr wrap="square">
-            <a:spAutoFit/>
-          </a:bodyPr>
-          <a:lstStyle/>
-          <a:p>
-            <a:pPr algn="ctr"/>
-            <a:r>
-              <a:rPr sz="2000" b="0" i="1">
-                <a:solidFill>
-                  <a:srgbClr val="8C8C8C"/>
-                </a:solidFill>
-                <a:latin typeface="Arial"/>
-              </a:rPr>
-              <a:t/>
+              <a:t>Me aceitas com meus medos, falhas e temores</a:t>
             </a:r>
           </a:p>
         </p:txBody>
@@ -5916,8 +5577,8 @@
         </p:nvSpPr>
         <p:spPr>
           <a:xfrm>
-            <a:off x="594360" y="1837944"/>
-            <a:ext cx="11002975" cy="685800"/>
+            <a:off x="640080" y="2052828"/>
+            <a:ext cx="10911535" cy="731520"/>
           </a:xfrm>
           <a:prstGeom prst="rect">
             <a:avLst/>
@@ -5932,13 +5593,13 @@
           <a:p>
             <a:pPr algn="ctr"/>
             <a:r>
-              <a:rPr sz="4400" b="1" i="0">
+              <a:rPr sz="4800" b="1" i="0">
                 <a:solidFill>
                   <a:srgbClr val="FFFFFF"/>
                 </a:solidFill>
                 <a:latin typeface="Arial"/>
               </a:rPr>
-              <a:t>主よ救いの神</a:t>
+              <a:t>Enche o meu viver</a:t>
             </a:r>
           </a:p>
         </p:txBody>
@@ -5951,8 +5612,8 @@
         </p:nvSpPr>
         <p:spPr>
           <a:xfrm>
-            <a:off x="594360" y="2560320"/>
-            <a:ext cx="11002975" cy="384048"/>
+            <a:off x="640080" y="2985516"/>
+            <a:ext cx="10911535" cy="731520"/>
           </a:xfrm>
           <a:prstGeom prst="rect">
             <a:avLst/>
@@ -5967,153 +5628,13 @@
           <a:p>
             <a:pPr algn="ctr"/>
             <a:r>
-              <a:rPr sz="2400" b="0" i="1">
-                <a:solidFill>
-                  <a:srgbClr val="B4B4B4"/>
+              <a:rPr sz="3500" b="1" i="0">
+                <a:solidFill>
+                  <a:srgbClr val="FFFFFF"/>
                 </a:solidFill>
                 <a:latin typeface="Arial"/>
               </a:rPr>
-              <a:t>shuyo sukui no kami</a:t>
-            </a:r>
-          </a:p>
-        </p:txBody>
-      </p:sp>
-      <p:sp>
-        <p:nvSpPr>
-          <p:cNvPr id="4" name="TextBox 3"/>
-          <p:cNvSpPr txBox="1"/>
-          <p:nvPr/>
-        </p:nvSpPr>
-        <p:spPr>
-          <a:xfrm>
-            <a:off x="594360" y="2980944"/>
-            <a:ext cx="11002975" cy="347472"/>
-          </a:xfrm>
-          <a:prstGeom prst="rect">
-            <a:avLst/>
-          </a:prstGeom>
-          <a:noFill/>
-        </p:spPr>
-        <p:txBody>
-          <a:bodyPr wrap="square">
-            <a:spAutoFit/>
-          </a:bodyPr>
-          <a:lstStyle/>
-          <a:p>
-            <a:pPr algn="ctr"/>
-            <a:r>
-              <a:rPr sz="2000" b="0" i="1">
-                <a:solidFill>
-                  <a:srgbClr val="8C8C8C"/>
-                </a:solidFill>
-                <a:latin typeface="Arial"/>
-              </a:rPr>
-              <a:t/>
-            </a:r>
-          </a:p>
-        </p:txBody>
-      </p:sp>
-      <p:sp>
-        <p:nvSpPr>
-          <p:cNvPr id="5" name="TextBox 4"/>
-          <p:cNvSpPr txBox="1"/>
-          <p:nvPr/>
-        </p:nvSpPr>
-        <p:spPr>
-          <a:xfrm>
-            <a:off x="594360" y="3529584"/>
-            <a:ext cx="11002975" cy="685800"/>
-          </a:xfrm>
-          <a:prstGeom prst="rect">
-            <a:avLst/>
-          </a:prstGeom>
-          <a:noFill/>
-        </p:spPr>
-        <p:txBody>
-          <a:bodyPr wrap="square">
-            <a:spAutoFit/>
-          </a:bodyPr>
-          <a:lstStyle/>
-          <a:p>
-            <a:pPr algn="ctr"/>
-            <a:r>
-              <a:rPr sz="4400" b="1" i="0">
-                <a:solidFill>
-                  <a:srgbClr val="FFFFFF"/>
-                </a:solidFill>
-                <a:latin typeface="Arial"/>
-              </a:rPr>
-              <a:t>山も動かす力強さ</a:t>
-            </a:r>
-          </a:p>
-        </p:txBody>
-      </p:sp>
-      <p:sp>
-        <p:nvSpPr>
-          <p:cNvPr id="6" name="TextBox 5"/>
-          <p:cNvSpPr txBox="1"/>
-          <p:nvPr/>
-        </p:nvSpPr>
-        <p:spPr>
-          <a:xfrm>
-            <a:off x="594360" y="4251960"/>
-            <a:ext cx="11002975" cy="384048"/>
-          </a:xfrm>
-          <a:prstGeom prst="rect">
-            <a:avLst/>
-          </a:prstGeom>
-          <a:noFill/>
-        </p:spPr>
-        <p:txBody>
-          <a:bodyPr wrap="square">
-            <a:spAutoFit/>
-          </a:bodyPr>
-          <a:lstStyle/>
-          <a:p>
-            <a:pPr algn="ctr"/>
-            <a:r>
-              <a:rPr sz="2400" b="0" i="1">
-                <a:solidFill>
-                  <a:srgbClr val="B4B4B4"/>
-                </a:solidFill>
-                <a:latin typeface="Arial"/>
-              </a:rPr>
-              <a:t>yama mo ugokasu chikarazuyosa</a:t>
-            </a:r>
-          </a:p>
-        </p:txBody>
-      </p:sp>
-      <p:sp>
-        <p:nvSpPr>
-          <p:cNvPr id="7" name="TextBox 6"/>
-          <p:cNvSpPr txBox="1"/>
-          <p:nvPr/>
-        </p:nvSpPr>
-        <p:spPr>
-          <a:xfrm>
-            <a:off x="594360" y="4672584"/>
-            <a:ext cx="11002975" cy="347472"/>
-          </a:xfrm>
-          <a:prstGeom prst="rect">
-            <a:avLst/>
-          </a:prstGeom>
-          <a:noFill/>
-        </p:spPr>
-        <p:txBody>
-          <a:bodyPr wrap="square">
-            <a:spAutoFit/>
-          </a:bodyPr>
-          <a:lstStyle/>
-          <a:p>
-            <a:pPr algn="ctr"/>
-            <a:r>
-              <a:rPr sz="2000" b="0" i="1">
-                <a:solidFill>
-                  <a:srgbClr val="8C8C8C"/>
-                </a:solidFill>
-                <a:latin typeface="Arial"/>
-              </a:rPr>
-              <a:t/>
+              <a:t>A minha vida entrego pra seguir teus passos</a:t>
             </a:r>
           </a:p>
         </p:txBody>

--- a/output_pptx/Mighty_To_Save.pptx
+++ b/output_pptx/Mighty_To_Save.pptx
@@ -3185,6 +3185,76 @@
           </a:p>
         </p:txBody>
       </p:sp>
+      <p:sp>
+        <p:nvSpPr>
+          <p:cNvPr id="4" name="TextBox 3"/>
+          <p:cNvSpPr txBox="1"/>
+          <p:nvPr/>
+        </p:nvSpPr>
+        <p:spPr>
+          <a:xfrm>
+            <a:off x="640080" y="4128516"/>
+            <a:ext cx="10911535" cy="310896"/>
+          </a:xfrm>
+          <a:prstGeom prst="rect">
+            <a:avLst/>
+          </a:prstGeom>
+          <a:noFill/>
+        </p:spPr>
+        <p:txBody>
+          <a:bodyPr wrap="square">
+            <a:spAutoFit/>
+          </a:bodyPr>
+          <a:lstStyle/>
+          <a:p>
+            <a:pPr algn="ctr"/>
+            <a:r>
+              <a:rPr sz="2000" b="0" i="0">
+                <a:solidFill>
+                  <a:srgbClr val="828282"/>
+                </a:solidFill>
+                <a:latin typeface="Arial"/>
+              </a:rPr>
+              <a:t>みんなは完全な愛が必要だ</a:t>
+            </a:r>
+          </a:p>
+        </p:txBody>
+      </p:sp>
+      <p:sp>
+        <p:nvSpPr>
+          <p:cNvPr id="5" name="TextBox 4"/>
+          <p:cNvSpPr txBox="1"/>
+          <p:nvPr/>
+        </p:nvSpPr>
+        <p:spPr>
+          <a:xfrm>
+            <a:off x="640080" y="4494276"/>
+            <a:ext cx="10911535" cy="310896"/>
+          </a:xfrm>
+          <a:prstGeom prst="rect">
+            <a:avLst/>
+          </a:prstGeom>
+          <a:noFill/>
+        </p:spPr>
+        <p:txBody>
+          <a:bodyPr wrap="square">
+            <a:spAutoFit/>
+          </a:bodyPr>
+          <a:lstStyle/>
+          <a:p>
+            <a:pPr algn="ctr"/>
+            <a:r>
+              <a:rPr sz="2000" b="0" i="0">
+                <a:solidFill>
+                  <a:srgbClr val="828282"/>
+                </a:solidFill>
+                <a:latin typeface="Arial"/>
+              </a:rPr>
+              <a:t>赦しと思いやり</a:t>
+            </a:r>
+          </a:p>
+        </p:txBody>
+      </p:sp>
     </p:spTree>
   </p:cSld>
   <p:clrMapOvr>
@@ -4120,6 +4190,76 @@
           </a:p>
         </p:txBody>
       </p:sp>
+      <p:sp>
+        <p:nvSpPr>
+          <p:cNvPr id="4" name="TextBox 3"/>
+          <p:cNvSpPr txBox="1"/>
+          <p:nvPr/>
+        </p:nvSpPr>
+        <p:spPr>
+          <a:xfrm>
+            <a:off x="640080" y="4128516"/>
+            <a:ext cx="10911535" cy="310896"/>
+          </a:xfrm>
+          <a:prstGeom prst="rect">
+            <a:avLst/>
+          </a:prstGeom>
+          <a:noFill/>
+        </p:spPr>
+        <p:txBody>
+          <a:bodyPr wrap="square">
+            <a:spAutoFit/>
+          </a:bodyPr>
+          <a:lstStyle/>
+          <a:p>
+            <a:pPr algn="ctr"/>
+            <a:r>
+              <a:rPr sz="2000" b="0" i="0">
+                <a:solidFill>
+                  <a:srgbClr val="828282"/>
+                </a:solidFill>
+                <a:latin typeface="Arial"/>
+              </a:rPr>
+              <a:t>世界が光の輝きを見ることができるように</a:t>
+            </a:r>
+          </a:p>
+        </p:txBody>
+      </p:sp>
+      <p:sp>
+        <p:nvSpPr>
+          <p:cNvPr id="5" name="TextBox 4"/>
+          <p:cNvSpPr txBox="1"/>
+          <p:nvPr/>
+        </p:nvSpPr>
+        <p:spPr>
+          <a:xfrm>
+            <a:off x="640080" y="4494276"/>
+            <a:ext cx="10911535" cy="310896"/>
+          </a:xfrm>
+          <a:prstGeom prst="rect">
+            <a:avLst/>
+          </a:prstGeom>
+          <a:noFill/>
+        </p:spPr>
+        <p:txBody>
+          <a:bodyPr wrap="square">
+            <a:spAutoFit/>
+          </a:bodyPr>
+          <a:lstStyle/>
+          <a:p>
+            <a:pPr algn="ctr"/>
+            <a:r>
+              <a:rPr sz="2000" b="0" i="0">
+                <a:solidFill>
+                  <a:srgbClr val="828282"/>
+                </a:solidFill>
+                <a:latin typeface="Arial"/>
+              </a:rPr>
+              <a:t>主イエスの栄光のために歌う</a:t>
+            </a:r>
+          </a:p>
+        </p:txBody>
+      </p:sp>
     </p:spTree>
   </p:cSld>
   <p:clrMapOvr>
@@ -4216,6 +4356,76 @@
           </a:p>
         </p:txBody>
       </p:sp>
+      <p:sp>
+        <p:nvSpPr>
+          <p:cNvPr id="4" name="TextBox 3"/>
+          <p:cNvSpPr txBox="1"/>
+          <p:nvPr/>
+        </p:nvSpPr>
+        <p:spPr>
+          <a:xfrm>
+            <a:off x="640080" y="4128516"/>
+            <a:ext cx="10911535" cy="310896"/>
+          </a:xfrm>
+          <a:prstGeom prst="rect">
+            <a:avLst/>
+          </a:prstGeom>
+          <a:noFill/>
+        </p:spPr>
+        <p:txBody>
+          <a:bodyPr wrap="square">
+            <a:spAutoFit/>
+          </a:bodyPr>
+          <a:lstStyle/>
+          <a:p>
+            <a:pPr algn="ctr"/>
+            <a:r>
+              <a:rPr sz="2000" b="0" i="0">
+                <a:solidFill>
+                  <a:srgbClr val="828282"/>
+                </a:solidFill>
+                <a:latin typeface="Arial"/>
+              </a:rPr>
+              <a:t>世界が光の輝きを見ることができるように</a:t>
+            </a:r>
+          </a:p>
+        </p:txBody>
+      </p:sp>
+      <p:sp>
+        <p:nvSpPr>
+          <p:cNvPr id="5" name="TextBox 4"/>
+          <p:cNvSpPr txBox="1"/>
+          <p:nvPr/>
+        </p:nvSpPr>
+        <p:spPr>
+          <a:xfrm>
+            <a:off x="640080" y="4494276"/>
+            <a:ext cx="10911535" cy="310896"/>
+          </a:xfrm>
+          <a:prstGeom prst="rect">
+            <a:avLst/>
+          </a:prstGeom>
+          <a:noFill/>
+        </p:spPr>
+        <p:txBody>
+          <a:bodyPr wrap="square">
+            <a:spAutoFit/>
+          </a:bodyPr>
+          <a:lstStyle/>
+          <a:p>
+            <a:pPr algn="ctr"/>
+            <a:r>
+              <a:rPr sz="2000" b="0" i="0">
+                <a:solidFill>
+                  <a:srgbClr val="828282"/>
+                </a:solidFill>
+                <a:latin typeface="Arial"/>
+              </a:rPr>
+              <a:t>主イエスの栄光のために歌う</a:t>
+            </a:r>
+          </a:p>
+        </p:txBody>
+      </p:sp>
     </p:spTree>
   </p:cSld>
   <p:clrMapOvr>
@@ -4312,6 +4522,76 @@
           </a:p>
         </p:txBody>
       </p:sp>
+      <p:sp>
+        <p:nvSpPr>
+          <p:cNvPr id="4" name="TextBox 3"/>
+          <p:cNvSpPr txBox="1"/>
+          <p:nvPr/>
+        </p:nvSpPr>
+        <p:spPr>
+          <a:xfrm>
+            <a:off x="640080" y="4128516"/>
+            <a:ext cx="10911535" cy="310896"/>
+          </a:xfrm>
+          <a:prstGeom prst="rect">
+            <a:avLst/>
+          </a:prstGeom>
+          <a:noFill/>
+        </p:spPr>
+        <p:txBody>
+          <a:bodyPr wrap="square">
+            <a:spAutoFit/>
+          </a:bodyPr>
+          <a:lstStyle/>
+          <a:p>
+            <a:pPr algn="ctr"/>
+            <a:r>
+              <a:rPr sz="2000" b="0" i="0">
+                <a:solidFill>
+                  <a:srgbClr val="828282"/>
+                </a:solidFill>
+                <a:latin typeface="Arial"/>
+              </a:rPr>
+              <a:t>世界が光の輝きを見ることができるように</a:t>
+            </a:r>
+          </a:p>
+        </p:txBody>
+      </p:sp>
+      <p:sp>
+        <p:nvSpPr>
+          <p:cNvPr id="5" name="TextBox 4"/>
+          <p:cNvSpPr txBox="1"/>
+          <p:nvPr/>
+        </p:nvSpPr>
+        <p:spPr>
+          <a:xfrm>
+            <a:off x="640080" y="4494276"/>
+            <a:ext cx="10911535" cy="310896"/>
+          </a:xfrm>
+          <a:prstGeom prst="rect">
+            <a:avLst/>
+          </a:prstGeom>
+          <a:noFill/>
+        </p:spPr>
+        <p:txBody>
+          <a:bodyPr wrap="square">
+            <a:spAutoFit/>
+          </a:bodyPr>
+          <a:lstStyle/>
+          <a:p>
+            <a:pPr algn="ctr"/>
+            <a:r>
+              <a:rPr sz="2000" b="0" i="0">
+                <a:solidFill>
+                  <a:srgbClr val="828282"/>
+                </a:solidFill>
+                <a:latin typeface="Arial"/>
+              </a:rPr>
+              <a:t>主イエスの栄光のために歌う</a:t>
+            </a:r>
+          </a:p>
+        </p:txBody>
+      </p:sp>
     </p:spTree>
   </p:cSld>
   <p:clrMapOvr>
@@ -4408,6 +4688,76 @@
           </a:p>
         </p:txBody>
       </p:sp>
+      <p:sp>
+        <p:nvSpPr>
+          <p:cNvPr id="4" name="TextBox 3"/>
+          <p:cNvSpPr txBox="1"/>
+          <p:nvPr/>
+        </p:nvSpPr>
+        <p:spPr>
+          <a:xfrm>
+            <a:off x="640080" y="4128516"/>
+            <a:ext cx="10911535" cy="310896"/>
+          </a:xfrm>
+          <a:prstGeom prst="rect">
+            <a:avLst/>
+          </a:prstGeom>
+          <a:noFill/>
+        </p:spPr>
+        <p:txBody>
+          <a:bodyPr wrap="square">
+            <a:spAutoFit/>
+          </a:bodyPr>
+          <a:lstStyle/>
+          <a:p>
+            <a:pPr algn="ctr"/>
+            <a:r>
+              <a:rPr sz="2000" b="0" i="0">
+                <a:solidFill>
+                  <a:srgbClr val="828282"/>
+                </a:solidFill>
+                <a:latin typeface="Arial"/>
+              </a:rPr>
+              <a:t>世界が光の輝きを見ることができるように</a:t>
+            </a:r>
+          </a:p>
+        </p:txBody>
+      </p:sp>
+      <p:sp>
+        <p:nvSpPr>
+          <p:cNvPr id="5" name="TextBox 4"/>
+          <p:cNvSpPr txBox="1"/>
+          <p:nvPr/>
+        </p:nvSpPr>
+        <p:spPr>
+          <a:xfrm>
+            <a:off x="640080" y="4494276"/>
+            <a:ext cx="10911535" cy="310896"/>
+          </a:xfrm>
+          <a:prstGeom prst="rect">
+            <a:avLst/>
+          </a:prstGeom>
+          <a:noFill/>
+        </p:spPr>
+        <p:txBody>
+          <a:bodyPr wrap="square">
+            <a:spAutoFit/>
+          </a:bodyPr>
+          <a:lstStyle/>
+          <a:p>
+            <a:pPr algn="ctr"/>
+            <a:r>
+              <a:rPr sz="2000" b="0" i="0">
+                <a:solidFill>
+                  <a:srgbClr val="828282"/>
+                </a:solidFill>
+                <a:latin typeface="Arial"/>
+              </a:rPr>
+              <a:t>主イエスの栄光のために歌う</a:t>
+            </a:r>
+          </a:p>
+        </p:txBody>
+      </p:sp>
     </p:spTree>
   </p:cSld>
   <p:clrMapOvr>
@@ -4504,6 +4854,76 @@
           </a:p>
         </p:txBody>
       </p:sp>
+      <p:sp>
+        <p:nvSpPr>
+          <p:cNvPr id="4" name="TextBox 3"/>
+          <p:cNvSpPr txBox="1"/>
+          <p:nvPr/>
+        </p:nvSpPr>
+        <p:spPr>
+          <a:xfrm>
+            <a:off x="640080" y="4128516"/>
+            <a:ext cx="10911535" cy="310896"/>
+          </a:xfrm>
+          <a:prstGeom prst="rect">
+            <a:avLst/>
+          </a:prstGeom>
+          <a:noFill/>
+        </p:spPr>
+        <p:txBody>
+          <a:bodyPr wrap="square">
+            <a:spAutoFit/>
+          </a:bodyPr>
+          <a:lstStyle/>
+          <a:p>
+            <a:pPr algn="ctr"/>
+            <a:r>
+              <a:rPr sz="2000" b="0" i="0">
+                <a:solidFill>
+                  <a:srgbClr val="828282"/>
+                </a:solidFill>
+                <a:latin typeface="Arial"/>
+              </a:rPr>
+              <a:t>世界が光の輝きを見ることができるように</a:t>
+            </a:r>
+          </a:p>
+        </p:txBody>
+      </p:sp>
+      <p:sp>
+        <p:nvSpPr>
+          <p:cNvPr id="5" name="TextBox 4"/>
+          <p:cNvSpPr txBox="1"/>
+          <p:nvPr/>
+        </p:nvSpPr>
+        <p:spPr>
+          <a:xfrm>
+            <a:off x="640080" y="4494276"/>
+            <a:ext cx="10911535" cy="310896"/>
+          </a:xfrm>
+          <a:prstGeom prst="rect">
+            <a:avLst/>
+          </a:prstGeom>
+          <a:noFill/>
+        </p:spPr>
+        <p:txBody>
+          <a:bodyPr wrap="square">
+            <a:spAutoFit/>
+          </a:bodyPr>
+          <a:lstStyle/>
+          <a:p>
+            <a:pPr algn="ctr"/>
+            <a:r>
+              <a:rPr sz="2000" b="0" i="0">
+                <a:solidFill>
+                  <a:srgbClr val="828282"/>
+                </a:solidFill>
+                <a:latin typeface="Arial"/>
+              </a:rPr>
+              <a:t>主イエスの栄光のために歌う</a:t>
+            </a:r>
+          </a:p>
+        </p:txBody>
+      </p:sp>
     </p:spTree>
   </p:cSld>
   <p:clrMapOvr>
@@ -4836,6 +5256,76 @@
           </a:p>
         </p:txBody>
       </p:sp>
+      <p:sp>
+        <p:nvSpPr>
+          <p:cNvPr id="4" name="TextBox 3"/>
+          <p:cNvSpPr txBox="1"/>
+          <p:nvPr/>
+        </p:nvSpPr>
+        <p:spPr>
+          <a:xfrm>
+            <a:off x="640080" y="4128516"/>
+            <a:ext cx="10911535" cy="310896"/>
+          </a:xfrm>
+          <a:prstGeom prst="rect">
+            <a:avLst/>
+          </a:prstGeom>
+          <a:noFill/>
+        </p:spPr>
+        <p:txBody>
+          <a:bodyPr wrap="square">
+            <a:spAutoFit/>
+          </a:bodyPr>
+          <a:lstStyle/>
+          <a:p>
+            <a:pPr algn="ctr"/>
+            <a:r>
+              <a:rPr sz="2000" b="0" i="0">
+                <a:solidFill>
+                  <a:srgbClr val="828282"/>
+                </a:solidFill>
+                <a:latin typeface="Arial"/>
+              </a:rPr>
+              <a:t>みんなは恵みと希望が必要だ</a:t>
+            </a:r>
+          </a:p>
+        </p:txBody>
+      </p:sp>
+      <p:sp>
+        <p:nvSpPr>
+          <p:cNvPr id="5" name="TextBox 4"/>
+          <p:cNvSpPr txBox="1"/>
+          <p:nvPr/>
+        </p:nvSpPr>
+        <p:spPr>
+          <a:xfrm>
+            <a:off x="640080" y="4494276"/>
+            <a:ext cx="10911535" cy="310896"/>
+          </a:xfrm>
+          <a:prstGeom prst="rect">
+            <a:avLst/>
+          </a:prstGeom>
+          <a:noFill/>
+        </p:spPr>
+        <p:txBody>
+          <a:bodyPr wrap="square">
+            <a:spAutoFit/>
+          </a:bodyPr>
+          <a:lstStyle/>
+          <a:p>
+            <a:pPr algn="ctr"/>
+            <a:r>
+              <a:rPr sz="2000" b="0" i="0">
+                <a:solidFill>
+                  <a:srgbClr val="828282"/>
+                </a:solidFill>
+                <a:latin typeface="Arial"/>
+              </a:rPr>
+              <a:t>救う神から</a:t>
+            </a:r>
+          </a:p>
+        </p:txBody>
+      </p:sp>
     </p:spTree>
   </p:cSld>
   <p:clrMapOvr>
@@ -5063,6 +5553,76 @@
           </a:p>
         </p:txBody>
       </p:sp>
+      <p:sp>
+        <p:nvSpPr>
+          <p:cNvPr id="4" name="TextBox 3"/>
+          <p:cNvSpPr txBox="1"/>
+          <p:nvPr/>
+        </p:nvSpPr>
+        <p:spPr>
+          <a:xfrm>
+            <a:off x="640080" y="4128516"/>
+            <a:ext cx="10911535" cy="310896"/>
+          </a:xfrm>
+          <a:prstGeom prst="rect">
+            <a:avLst/>
+          </a:prstGeom>
+          <a:noFill/>
+        </p:spPr>
+        <p:txBody>
+          <a:bodyPr wrap="square">
+            <a:spAutoFit/>
+          </a:bodyPr>
+          <a:lstStyle/>
+          <a:p>
+            <a:pPr algn="ctr"/>
+            <a:r>
+              <a:rPr sz="2000" b="0" i="0">
+                <a:solidFill>
+                  <a:srgbClr val="828282"/>
+                </a:solidFill>
+                <a:latin typeface="Arial"/>
+              </a:rPr>
+              <a:t>キリストは山々を動かし</a:t>
+            </a:r>
+          </a:p>
+        </p:txBody>
+      </p:sp>
+      <p:sp>
+        <p:nvSpPr>
+          <p:cNvPr id="5" name="TextBox 4"/>
+          <p:cNvSpPr txBox="1"/>
+          <p:nvPr/>
+        </p:nvSpPr>
+        <p:spPr>
+          <a:xfrm>
+            <a:off x="640080" y="4494276"/>
+            <a:ext cx="10911535" cy="310896"/>
+          </a:xfrm>
+          <a:prstGeom prst="rect">
+            <a:avLst/>
+          </a:prstGeom>
+          <a:noFill/>
+        </p:spPr>
+        <p:txBody>
+          <a:bodyPr wrap="square">
+            <a:spAutoFit/>
+          </a:bodyPr>
+          <a:lstStyle/>
+          <a:p>
+            <a:pPr algn="ctr"/>
+            <a:r>
+              <a:rPr sz="2000" b="0" i="0">
+                <a:solidFill>
+                  <a:srgbClr val="828282"/>
+                </a:solidFill>
+                <a:latin typeface="Arial"/>
+              </a:rPr>
+              <a:t>救う力を持つ</a:t>
+            </a:r>
+          </a:p>
+        </p:txBody>
+      </p:sp>
     </p:spTree>
   </p:cSld>
   <p:clrMapOvr>
@@ -5159,6 +5719,76 @@
           </a:p>
         </p:txBody>
       </p:sp>
+      <p:sp>
+        <p:nvSpPr>
+          <p:cNvPr id="4" name="TextBox 3"/>
+          <p:cNvSpPr txBox="1"/>
+          <p:nvPr/>
+        </p:nvSpPr>
+        <p:spPr>
+          <a:xfrm>
+            <a:off x="640080" y="4128516"/>
+            <a:ext cx="10911535" cy="310896"/>
+          </a:xfrm>
+          <a:prstGeom prst="rect">
+            <a:avLst/>
+          </a:prstGeom>
+          <a:noFill/>
+        </p:spPr>
+        <p:txBody>
+          <a:bodyPr wrap="square">
+            <a:spAutoFit/>
+          </a:bodyPr>
+          <a:lstStyle/>
+          <a:p>
+            <a:pPr algn="ctr"/>
+            <a:r>
+              <a:rPr sz="2000" b="0" i="0">
+                <a:solidFill>
+                  <a:srgbClr val="828282"/>
+                </a:solidFill>
+                <a:latin typeface="Arial"/>
+              </a:rPr>
+              <a:t>みんなは完全な愛が必要だ</a:t>
+            </a:r>
+          </a:p>
+        </p:txBody>
+      </p:sp>
+      <p:sp>
+        <p:nvSpPr>
+          <p:cNvPr id="5" name="TextBox 4"/>
+          <p:cNvSpPr txBox="1"/>
+          <p:nvPr/>
+        </p:nvSpPr>
+        <p:spPr>
+          <a:xfrm>
+            <a:off x="640080" y="4494276"/>
+            <a:ext cx="10911535" cy="310896"/>
+          </a:xfrm>
+          <a:prstGeom prst="rect">
+            <a:avLst/>
+          </a:prstGeom>
+          <a:noFill/>
+        </p:spPr>
+        <p:txBody>
+          <a:bodyPr wrap="square">
+            <a:spAutoFit/>
+          </a:bodyPr>
+          <a:lstStyle/>
+          <a:p>
+            <a:pPr algn="ctr"/>
+            <a:r>
+              <a:rPr sz="2000" b="0" i="0">
+                <a:solidFill>
+                  <a:srgbClr val="828282"/>
+                </a:solidFill>
+                <a:latin typeface="Arial"/>
+              </a:rPr>
+              <a:t>赦しと思いやり</a:t>
+            </a:r>
+          </a:p>
+        </p:txBody>
+      </p:sp>
     </p:spTree>
   </p:cSld>
   <p:clrMapOvr>
@@ -5255,6 +5885,76 @@
           </a:p>
         </p:txBody>
       </p:sp>
+      <p:sp>
+        <p:nvSpPr>
+          <p:cNvPr id="4" name="TextBox 3"/>
+          <p:cNvSpPr txBox="1"/>
+          <p:nvPr/>
+        </p:nvSpPr>
+        <p:spPr>
+          <a:xfrm>
+            <a:off x="640080" y="4128516"/>
+            <a:ext cx="10911535" cy="310896"/>
+          </a:xfrm>
+          <a:prstGeom prst="rect">
+            <a:avLst/>
+          </a:prstGeom>
+          <a:noFill/>
+        </p:spPr>
+        <p:txBody>
+          <a:bodyPr wrap="square">
+            <a:spAutoFit/>
+          </a:bodyPr>
+          <a:lstStyle/>
+          <a:p>
+            <a:pPr algn="ctr"/>
+            <a:r>
+              <a:rPr sz="2000" b="0" i="0">
+                <a:solidFill>
+                  <a:srgbClr val="828282"/>
+                </a:solidFill>
+                <a:latin typeface="Arial"/>
+              </a:rPr>
+              <a:t>みんなは恵みと希望が必要だ</a:t>
+            </a:r>
+          </a:p>
+        </p:txBody>
+      </p:sp>
+      <p:sp>
+        <p:nvSpPr>
+          <p:cNvPr id="5" name="TextBox 4"/>
+          <p:cNvSpPr txBox="1"/>
+          <p:nvPr/>
+        </p:nvSpPr>
+        <p:spPr>
+          <a:xfrm>
+            <a:off x="640080" y="4494276"/>
+            <a:ext cx="10911535" cy="310896"/>
+          </a:xfrm>
+          <a:prstGeom prst="rect">
+            <a:avLst/>
+          </a:prstGeom>
+          <a:noFill/>
+        </p:spPr>
+        <p:txBody>
+          <a:bodyPr wrap="square">
+            <a:spAutoFit/>
+          </a:bodyPr>
+          <a:lstStyle/>
+          <a:p>
+            <a:pPr algn="ctr"/>
+            <a:r>
+              <a:rPr sz="2000" b="0" i="0">
+                <a:solidFill>
+                  <a:srgbClr val="828282"/>
+                </a:solidFill>
+                <a:latin typeface="Arial"/>
+              </a:rPr>
+              <a:t>救う神から</a:t>
+            </a:r>
+          </a:p>
+        </p:txBody>
+      </p:sp>
     </p:spTree>
   </p:cSld>
   <p:clrMapOvr>
@@ -5351,6 +6051,76 @@
           </a:p>
         </p:txBody>
       </p:sp>
+      <p:sp>
+        <p:nvSpPr>
+          <p:cNvPr id="4" name="TextBox 3"/>
+          <p:cNvSpPr txBox="1"/>
+          <p:nvPr/>
+        </p:nvSpPr>
+        <p:spPr>
+          <a:xfrm>
+            <a:off x="640080" y="4128516"/>
+            <a:ext cx="10911535" cy="310896"/>
+          </a:xfrm>
+          <a:prstGeom prst="rect">
+            <a:avLst/>
+          </a:prstGeom>
+          <a:noFill/>
+        </p:spPr>
+        <p:txBody>
+          <a:bodyPr wrap="square">
+            <a:spAutoFit/>
+          </a:bodyPr>
+          <a:lstStyle/>
+          <a:p>
+            <a:pPr algn="ctr"/>
+            <a:r>
+              <a:rPr sz="2000" b="0" i="0">
+                <a:solidFill>
+                  <a:srgbClr val="828282"/>
+                </a:solidFill>
+                <a:latin typeface="Arial"/>
+              </a:rPr>
+              <a:t>キリストは山々を動かし</a:t>
+            </a:r>
+          </a:p>
+        </p:txBody>
+      </p:sp>
+      <p:sp>
+        <p:nvSpPr>
+          <p:cNvPr id="5" name="TextBox 4"/>
+          <p:cNvSpPr txBox="1"/>
+          <p:nvPr/>
+        </p:nvSpPr>
+        <p:spPr>
+          <a:xfrm>
+            <a:off x="640080" y="4494276"/>
+            <a:ext cx="10911535" cy="310896"/>
+          </a:xfrm>
+          <a:prstGeom prst="rect">
+            <a:avLst/>
+          </a:prstGeom>
+          <a:noFill/>
+        </p:spPr>
+        <p:txBody>
+          <a:bodyPr wrap="square">
+            <a:spAutoFit/>
+          </a:bodyPr>
+          <a:lstStyle/>
+          <a:p>
+            <a:pPr algn="ctr"/>
+            <a:r>
+              <a:rPr sz="2000" b="0" i="0">
+                <a:solidFill>
+                  <a:srgbClr val="828282"/>
+                </a:solidFill>
+                <a:latin typeface="Arial"/>
+              </a:rPr>
+              <a:t>救う力を持つ</a:t>
+            </a:r>
+          </a:p>
+        </p:txBody>
+      </p:sp>
     </p:spTree>
   </p:cSld>
   <p:clrMapOvr>
@@ -5447,6 +6217,76 @@
           </a:p>
         </p:txBody>
       </p:sp>
+      <p:sp>
+        <p:nvSpPr>
+          <p:cNvPr id="4" name="TextBox 3"/>
+          <p:cNvSpPr txBox="1"/>
+          <p:nvPr/>
+        </p:nvSpPr>
+        <p:spPr>
+          <a:xfrm>
+            <a:off x="640080" y="4128516"/>
+            <a:ext cx="10911535" cy="310896"/>
+          </a:xfrm>
+          <a:prstGeom prst="rect">
+            <a:avLst/>
+          </a:prstGeom>
+          <a:noFill/>
+        </p:spPr>
+        <p:txBody>
+          <a:bodyPr wrap="square">
+            <a:spAutoFit/>
+          </a:bodyPr>
+          <a:lstStyle/>
+          <a:p>
+            <a:pPr algn="ctr"/>
+            <a:r>
+              <a:rPr sz="2000" b="0" i="0">
+                <a:solidFill>
+                  <a:srgbClr val="828282"/>
+                </a:solidFill>
+                <a:latin typeface="Arial"/>
+              </a:rPr>
+              <a:t>救う力を持つ</a:t>
+            </a:r>
+          </a:p>
+        </p:txBody>
+      </p:sp>
+      <p:sp>
+        <p:nvSpPr>
+          <p:cNvPr id="5" name="TextBox 4"/>
+          <p:cNvSpPr txBox="1"/>
+          <p:nvPr/>
+        </p:nvSpPr>
+        <p:spPr>
+          <a:xfrm>
+            <a:off x="640080" y="4494276"/>
+            <a:ext cx="10911535" cy="310896"/>
+          </a:xfrm>
+          <a:prstGeom prst="rect">
+            <a:avLst/>
+          </a:prstGeom>
+          <a:noFill/>
+        </p:spPr>
+        <p:txBody>
+          <a:bodyPr wrap="square">
+            <a:spAutoFit/>
+          </a:bodyPr>
+          <a:lstStyle/>
+          <a:p>
+            <a:pPr algn="ctr"/>
+            <a:r>
+              <a:rPr sz="2000" b="0" i="0">
+                <a:solidFill>
+                  <a:srgbClr val="828282"/>
+                </a:solidFill>
+                <a:latin typeface="Arial"/>
+              </a:rPr>
+              <a:t>永遠に救いの著者</a:t>
+            </a:r>
+          </a:p>
+        </p:txBody>
+      </p:sp>
     </p:spTree>
   </p:cSld>
   <p:clrMapOvr>
@@ -5543,6 +6383,76 @@
           </a:p>
         </p:txBody>
       </p:sp>
+      <p:sp>
+        <p:nvSpPr>
+          <p:cNvPr id="4" name="TextBox 3"/>
+          <p:cNvSpPr txBox="1"/>
+          <p:nvPr/>
+        </p:nvSpPr>
+        <p:spPr>
+          <a:xfrm>
+            <a:off x="640080" y="4128516"/>
+            <a:ext cx="10911535" cy="310896"/>
+          </a:xfrm>
+          <a:prstGeom prst="rect">
+            <a:avLst/>
+          </a:prstGeom>
+          <a:noFill/>
+        </p:spPr>
+        <p:txBody>
+          <a:bodyPr wrap="square">
+            <a:spAutoFit/>
+          </a:bodyPr>
+          <a:lstStyle/>
+          <a:p>
+            <a:pPr algn="ctr"/>
+            <a:r>
+              <a:rPr sz="2000" b="0" i="0">
+                <a:solidFill>
+                  <a:srgbClr val="828282"/>
+                </a:solidFill>
+                <a:latin typeface="Arial"/>
+              </a:rPr>
+              <a:t>イエスは死に勝った、死に勝った</a:t>
+            </a:r>
+          </a:p>
+        </p:txBody>
+      </p:sp>
+      <p:sp>
+        <p:nvSpPr>
+          <p:cNvPr id="5" name="TextBox 4"/>
+          <p:cNvSpPr txBox="1"/>
+          <p:nvPr/>
+        </p:nvSpPr>
+        <p:spPr>
+          <a:xfrm>
+            <a:off x="640080" y="4494276"/>
+            <a:ext cx="10911535" cy="310896"/>
+          </a:xfrm>
+          <a:prstGeom prst="rect">
+            <a:avLst/>
+          </a:prstGeom>
+          <a:noFill/>
+        </p:spPr>
+        <p:txBody>
+          <a:bodyPr wrap="square">
+            <a:spAutoFit/>
+          </a:bodyPr>
+          <a:lstStyle/>
+          <a:p>
+            <a:pPr algn="ctr"/>
+            <a:r>
+              <a:rPr sz="2000" b="0" i="0">
+                <a:solidFill>
+                  <a:srgbClr val="828282"/>
+                </a:solidFill>
+                <a:latin typeface="Arial"/>
+              </a:rPr>
+              <a:t>私の恐れ、失敗、不安を受け入れてくれる</a:t>
+            </a:r>
+          </a:p>
+        </p:txBody>
+      </p:sp>
     </p:spTree>
   </p:cSld>
   <p:clrMapOvr>
@@ -5635,6 +6545,76 @@
                 <a:latin typeface="Arial"/>
               </a:rPr>
               <a:t>A minha vida entrego pra seguir teus passos</a:t>
+            </a:r>
+          </a:p>
+        </p:txBody>
+      </p:sp>
+      <p:sp>
+        <p:nvSpPr>
+          <p:cNvPr id="4" name="TextBox 3"/>
+          <p:cNvSpPr txBox="1"/>
+          <p:nvPr/>
+        </p:nvSpPr>
+        <p:spPr>
+          <a:xfrm>
+            <a:off x="640080" y="4128516"/>
+            <a:ext cx="10911535" cy="310896"/>
+          </a:xfrm>
+          <a:prstGeom prst="rect">
+            <a:avLst/>
+          </a:prstGeom>
+          <a:noFill/>
+        </p:spPr>
+        <p:txBody>
+          <a:bodyPr wrap="square">
+            <a:spAutoFit/>
+          </a:bodyPr>
+          <a:lstStyle/>
+          <a:p>
+            <a:pPr algn="ctr"/>
+            <a:r>
+              <a:rPr sz="2000" b="0" i="0">
+                <a:solidFill>
+                  <a:srgbClr val="828282"/>
+                </a:solidFill>
+                <a:latin typeface="Arial"/>
+              </a:rPr>
+              <a:t>私の人生を満たしてください</a:t>
+            </a:r>
+          </a:p>
+        </p:txBody>
+      </p:sp>
+      <p:sp>
+        <p:nvSpPr>
+          <p:cNvPr id="5" name="TextBox 4"/>
+          <p:cNvSpPr txBox="1"/>
+          <p:nvPr/>
+        </p:nvSpPr>
+        <p:spPr>
+          <a:xfrm>
+            <a:off x="640080" y="4494276"/>
+            <a:ext cx="10911535" cy="310896"/>
+          </a:xfrm>
+          <a:prstGeom prst="rect">
+            <a:avLst/>
+          </a:prstGeom>
+          <a:noFill/>
+        </p:spPr>
+        <p:txBody>
+          <a:bodyPr wrap="square">
+            <a:spAutoFit/>
+          </a:bodyPr>
+          <a:lstStyle/>
+          <a:p>
+            <a:pPr algn="ctr"/>
+            <a:r>
+              <a:rPr sz="2000" b="0" i="0">
+                <a:solidFill>
+                  <a:srgbClr val="828282"/>
+                </a:solidFill>
+                <a:latin typeface="Arial"/>
+              </a:rPr>
+              <a:t>私の人生をあなたの足跡をたどるために捧げます</a:t>
             </a:r>
           </a:p>
         </p:txBody>
